--- a/Fase1/03_results/Evaluación PID– Plataforma Inclinada.pptx
+++ b/Fase1/03_results/Evaluación PID– Plataforma Inclinada.pptx
@@ -113,6 +113,11 @@
       </a:defRPr>
     </a:lvl9pPr>
   </p:defaultTextStyle>
+  <p:extLst>
+    <p:ext uri="{EFAFB233-063F-42B5-8137-9DF3F51BA10A}">
+      <p15:sldGuideLst xmlns:p15="http://schemas.microsoft.com/office/powerpoint/2012/main"/>
+    </p:ext>
+  </p:extLst>
 </p:presentation>
 </file>
 
@@ -198,7 +203,7 @@
           <a:p>
             <a:fld id="{0F761F89-5454-8843-B889-F1738EEE3083}" type="datetimeFigureOut">
               <a:rPr lang="es-ES_tradnl" smtClean="0"/>
-              <a:t>28/3/26</a:t>
+              <a:t>6/4/26</a:t>
             </a:fld>
             <a:endParaRPr lang="es-ES_tradnl"/>
           </a:p>
@@ -735,7 +740,7 @@
           <a:p>
             <a:fld id="{CE9EE5DA-C0C3-A543-8CAD-339D583E7A01}" type="datetimeFigureOut">
               <a:rPr lang="es-ES_tradnl" smtClean="0"/>
-              <a:t>28/3/26</a:t>
+              <a:t>6/4/26</a:t>
             </a:fld>
             <a:endParaRPr lang="es-ES_tradnl"/>
           </a:p>
@@ -935,7 +940,7 @@
           <a:p>
             <a:fld id="{CE9EE5DA-C0C3-A543-8CAD-339D583E7A01}" type="datetimeFigureOut">
               <a:rPr lang="es-ES_tradnl" smtClean="0"/>
-              <a:t>28/3/26</a:t>
+              <a:t>6/4/26</a:t>
             </a:fld>
             <a:endParaRPr lang="es-ES_tradnl"/>
           </a:p>
@@ -1145,7 +1150,7 @@
           <a:p>
             <a:fld id="{CE9EE5DA-C0C3-A543-8CAD-339D583E7A01}" type="datetimeFigureOut">
               <a:rPr lang="es-ES_tradnl" smtClean="0"/>
-              <a:t>28/3/26</a:t>
+              <a:t>6/4/26</a:t>
             </a:fld>
             <a:endParaRPr lang="es-ES_tradnl"/>
           </a:p>
@@ -2295,7 +2300,7 @@
           <a:p>
             <a:fld id="{CE9EE5DA-C0C3-A543-8CAD-339D583E7A01}" type="datetimeFigureOut">
               <a:rPr lang="es-ES_tradnl" smtClean="0"/>
-              <a:t>28/3/26</a:t>
+              <a:t>6/4/26</a:t>
             </a:fld>
             <a:endParaRPr lang="es-ES_tradnl"/>
           </a:p>
@@ -2571,7 +2576,7 @@
           <a:p>
             <a:fld id="{CE9EE5DA-C0C3-A543-8CAD-339D583E7A01}" type="datetimeFigureOut">
               <a:rPr lang="es-ES_tradnl" smtClean="0"/>
-              <a:t>28/3/26</a:t>
+              <a:t>6/4/26</a:t>
             </a:fld>
             <a:endParaRPr lang="es-ES_tradnl"/>
           </a:p>
@@ -2839,7 +2844,7 @@
           <a:p>
             <a:fld id="{CE9EE5DA-C0C3-A543-8CAD-339D583E7A01}" type="datetimeFigureOut">
               <a:rPr lang="es-ES_tradnl" smtClean="0"/>
-              <a:t>28/3/26</a:t>
+              <a:t>6/4/26</a:t>
             </a:fld>
             <a:endParaRPr lang="es-ES_tradnl"/>
           </a:p>
@@ -3254,7 +3259,7 @@
           <a:p>
             <a:fld id="{CE9EE5DA-C0C3-A543-8CAD-339D583E7A01}" type="datetimeFigureOut">
               <a:rPr lang="es-ES_tradnl" smtClean="0"/>
-              <a:t>28/3/26</a:t>
+              <a:t>6/4/26</a:t>
             </a:fld>
             <a:endParaRPr lang="es-ES_tradnl"/>
           </a:p>
@@ -3396,7 +3401,7 @@
           <a:p>
             <a:fld id="{CE9EE5DA-C0C3-A543-8CAD-339D583E7A01}" type="datetimeFigureOut">
               <a:rPr lang="es-ES_tradnl" smtClean="0"/>
-              <a:t>28/3/26</a:t>
+              <a:t>6/4/26</a:t>
             </a:fld>
             <a:endParaRPr lang="es-ES_tradnl"/>
           </a:p>
@@ -3509,7 +3514,7 @@
           <a:p>
             <a:fld id="{CE9EE5DA-C0C3-A543-8CAD-339D583E7A01}" type="datetimeFigureOut">
               <a:rPr lang="es-ES_tradnl" smtClean="0"/>
-              <a:t>28/3/26</a:t>
+              <a:t>6/4/26</a:t>
             </a:fld>
             <a:endParaRPr lang="es-ES_tradnl"/>
           </a:p>
@@ -3822,7 +3827,7 @@
           <a:p>
             <a:fld id="{CE9EE5DA-C0C3-A543-8CAD-339D583E7A01}" type="datetimeFigureOut">
               <a:rPr lang="es-ES_tradnl" smtClean="0"/>
-              <a:t>28/3/26</a:t>
+              <a:t>6/4/26</a:t>
             </a:fld>
             <a:endParaRPr lang="es-ES_tradnl"/>
           </a:p>
@@ -4111,7 +4116,7 @@
           <a:p>
             <a:fld id="{CE9EE5DA-C0C3-A543-8CAD-339D583E7A01}" type="datetimeFigureOut">
               <a:rPr lang="es-ES_tradnl" smtClean="0"/>
-              <a:t>28/3/26</a:t>
+              <a:t>6/4/26</a:t>
             </a:fld>
             <a:endParaRPr lang="es-ES_tradnl"/>
           </a:p>
@@ -4354,7 +4359,7 @@
           <a:p>
             <a:fld id="{CE9EE5DA-C0C3-A543-8CAD-339D583E7A01}" type="datetimeFigureOut">
               <a:rPr lang="es-ES_tradnl" smtClean="0"/>
-              <a:t>28/3/26</a:t>
+              <a:t>6/4/26</a:t>
             </a:fld>
             <a:endParaRPr lang="es-ES_tradnl"/>
           </a:p>
@@ -4937,38 +4942,6 @@
           </a:p>
         </p:txBody>
       </p:sp>
-      <p:pic>
-        <p:nvPicPr>
-          <p:cNvPr id="9" name="Onlinebild-Platzhalter 8">
-            <a:extLst>
-              <a:ext uri="{FF2B5EF4-FFF2-40B4-BE49-F238E27FC236}">
-                <a16:creationId xmlns:a16="http://schemas.microsoft.com/office/drawing/2014/main" id="{B806082D-AABA-41D0-9534-F15D93096D16}"/>
-              </a:ext>
-            </a:extLst>
-          </p:cNvPr>
-          <p:cNvPicPr>
-            <a:picLocks noGrp="1" noChangeAspect="1"/>
-          </p:cNvPicPr>
-          <p:nvPr>
-            <p:ph type="clipArt" sz="quarter" idx="15"/>
-          </p:nvPr>
-        </p:nvPicPr>
-        <p:blipFill>
-          <a:blip r:embed="rId2"/>
-          <a:stretch>
-            <a:fillRect/>
-          </a:stretch>
-        </p:blipFill>
-        <p:spPr>
-          <a:xfrm>
-            <a:off x="583920" y="2151063"/>
-            <a:ext cx="5239310" cy="4008437"/>
-          </a:xfrm>
-          <a:prstGeom prst="rect">
-            <a:avLst/>
-          </a:prstGeom>
-        </p:spPr>
-      </p:pic>
       <p:sp>
         <p:nvSpPr>
           <p:cNvPr id="2" name="Fußzeilenplatzhalter 2">
@@ -5099,6 +5072,38 @@
           </a:p>
         </p:txBody>
       </p:sp>
+      <p:pic>
+        <p:nvPicPr>
+          <p:cNvPr id="6" name="Onlinebild-Platzhalter 5">
+            <a:extLst>
+              <a:ext uri="{FF2B5EF4-FFF2-40B4-BE49-F238E27FC236}">
+                <a16:creationId xmlns:a16="http://schemas.microsoft.com/office/drawing/2014/main" id="{4CCD5CE6-F0A8-38A0-1C7F-FF2956DC8CCD}"/>
+              </a:ext>
+            </a:extLst>
+          </p:cNvPr>
+          <p:cNvPicPr>
+            <a:picLocks noGrp="1" noChangeAspect="1"/>
+          </p:cNvPicPr>
+          <p:nvPr>
+            <p:ph type="clipArt" sz="quarter" idx="15"/>
+          </p:nvPr>
+        </p:nvPicPr>
+        <p:blipFill>
+          <a:blip r:embed="rId2"/>
+          <a:stretch>
+            <a:fillRect/>
+          </a:stretch>
+        </p:blipFill>
+        <p:spPr>
+          <a:xfrm>
+            <a:off x="583920" y="2151063"/>
+            <a:ext cx="5239310" cy="4008437"/>
+          </a:xfrm>
+          <a:prstGeom prst="rect">
+            <a:avLst/>
+          </a:prstGeom>
+        </p:spPr>
+      </p:pic>
     </p:spTree>
     <p:extLst>
       <p:ext uri="{BB962C8B-B14F-4D97-AF65-F5344CB8AC3E}">
@@ -5189,7 +5194,7 @@
             <p:ph sz="quarter" idx="14"/>
             <p:extLst>
               <p:ext uri="{D42A27DB-BD31-4B8C-83A1-F6EECF244321}">
-                <p14:modId xmlns:p14="http://schemas.microsoft.com/office/powerpoint/2010/main" val="3265517814"/>
+                <p14:modId xmlns:p14="http://schemas.microsoft.com/office/powerpoint/2010/main" val="556109059"/>
               </p:ext>
             </p:extLst>
           </p:nvPr>
@@ -6219,7 +6224,7 @@
                         <a:buNone/>
                       </a:pPr>
                       <a:r>
-                        <a:rPr lang="es-ES_tradnl" sz="1100" dirty="0">
+                        <a:rPr lang="es-ES_tradnl" sz="900" dirty="0">
                           <a:effectLst/>
                           <a:latin typeface="Times New Roman" panose="02020603050405020304" pitchFamily="18" charset="0"/>
                           <a:ea typeface="Times New Roman" panose="02020603050405020304" pitchFamily="18" charset="0"/>
@@ -6251,7 +6256,7 @@
                         <a:buNone/>
                       </a:pPr>
                       <a:r>
-                        <a:rPr lang="es-ES_tradnl" sz="1100" dirty="0">
+                        <a:rPr lang="es-ES_tradnl" sz="900" dirty="0">
                           <a:effectLst/>
                           <a:latin typeface="Times New Roman" panose="02020603050405020304" pitchFamily="18" charset="0"/>
                           <a:ea typeface="Times New Roman" panose="02020603050405020304" pitchFamily="18" charset="0"/>
@@ -6283,7 +6288,7 @@
                         <a:buNone/>
                       </a:pPr>
                       <a:r>
-                        <a:rPr lang="es-ES_tradnl" sz="1100" dirty="0">
+                        <a:rPr lang="es-ES_tradnl" sz="900" dirty="0">
                           <a:effectLst/>
                           <a:latin typeface="Times New Roman" panose="02020603050405020304" pitchFamily="18" charset="0"/>
                           <a:ea typeface="Times New Roman" panose="02020603050405020304" pitchFamily="18" charset="0"/>
@@ -6315,7 +6320,7 @@
                         <a:buNone/>
                       </a:pPr>
                       <a:r>
-                        <a:rPr lang="es-ES_tradnl" sz="1100" dirty="0">
+                        <a:rPr lang="es-ES_tradnl" sz="900" dirty="0">
                           <a:effectLst/>
                           <a:latin typeface="Times New Roman" panose="02020603050405020304" pitchFamily="18" charset="0"/>
                           <a:ea typeface="Times New Roman" panose="02020603050405020304" pitchFamily="18" charset="0"/>
@@ -6347,7 +6352,7 @@
                         <a:buNone/>
                       </a:pPr>
                       <a:r>
-                        <a:rPr lang="es-ES_tradnl" sz="1100" dirty="0">
+                        <a:rPr lang="es-ES_tradnl" sz="900" dirty="0">
                           <a:effectLst/>
                           <a:latin typeface="Times New Roman" panose="02020603050405020304" pitchFamily="18" charset="0"/>
                           <a:ea typeface="Times New Roman" panose="02020603050405020304" pitchFamily="18" charset="0"/>
@@ -6379,7 +6384,7 @@
                         <a:buNone/>
                       </a:pPr>
                       <a:r>
-                        <a:rPr lang="es-ES_tradnl" sz="1100" dirty="0">
+                        <a:rPr lang="es-ES_tradnl" sz="900" dirty="0">
                           <a:effectLst/>
                           <a:latin typeface="Times New Roman" panose="02020603050405020304" pitchFamily="18" charset="0"/>
                           <a:ea typeface="Times New Roman" panose="02020603050405020304" pitchFamily="18" charset="0"/>
@@ -6411,7 +6416,7 @@
                         <a:buNone/>
                       </a:pPr>
                       <a:r>
-                        <a:rPr lang="es-ES_tradnl" sz="1100" dirty="0">
+                        <a:rPr lang="es-ES_tradnl" sz="900" dirty="0">
                           <a:effectLst/>
                           <a:latin typeface="Times New Roman" panose="02020603050405020304" pitchFamily="18" charset="0"/>
                           <a:ea typeface="Times New Roman" panose="02020603050405020304" pitchFamily="18" charset="0"/>
@@ -6443,7 +6448,7 @@
                         <a:buNone/>
                       </a:pPr>
                       <a:r>
-                        <a:rPr lang="es-ES_tradnl" sz="1100" dirty="0">
+                        <a:rPr lang="es-ES_tradnl" sz="900" dirty="0">
                           <a:effectLst/>
                           <a:latin typeface="Times New Roman" panose="02020603050405020304" pitchFamily="18" charset="0"/>
                           <a:ea typeface="Times New Roman" panose="02020603050405020304" pitchFamily="18" charset="0"/>
@@ -6475,7 +6480,7 @@
                         <a:buNone/>
                       </a:pPr>
                       <a:r>
-                        <a:rPr lang="es-ES_tradnl" sz="1100" dirty="0">
+                        <a:rPr lang="es-ES_tradnl" sz="900" dirty="0">
                           <a:effectLst/>
                           <a:latin typeface="Times New Roman" panose="02020603050405020304" pitchFamily="18" charset="0"/>
                           <a:ea typeface="Times New Roman" panose="02020603050405020304" pitchFamily="18" charset="0"/>
@@ -6507,7 +6512,7 @@
                         <a:buNone/>
                       </a:pPr>
                       <a:r>
-                        <a:rPr lang="es-ES_tradnl" sz="1100" dirty="0">
+                        <a:rPr lang="es-ES_tradnl" sz="900" dirty="0">
                           <a:effectLst/>
                           <a:latin typeface="Times New Roman" panose="02020603050405020304" pitchFamily="18" charset="0"/>
                           <a:ea typeface="Times New Roman" panose="02020603050405020304" pitchFamily="18" charset="0"/>
@@ -6539,14 +6544,20 @@
                         <a:buNone/>
                       </a:pPr>
                       <a:r>
-                        <a:rPr lang="es-ES_tradnl" sz="1100" dirty="0">
+                        <a:rPr lang="es-ES" sz="900">
                           <a:effectLst/>
                           <a:latin typeface="Times New Roman" panose="02020603050405020304" pitchFamily="18" charset="0"/>
                           <a:ea typeface="Times New Roman" panose="02020603050405020304" pitchFamily="18" charset="0"/>
                           <a:cs typeface="Times New Roman" panose="02020603050405020304" pitchFamily="18" charset="0"/>
                         </a:rPr>
-                        <a:t>161.01</a:t>
-                      </a:r>
+                        <a:t>6.00</a:t>
+                      </a:r>
+                      <a:endParaRPr lang="de-DE" sz="900">
+                        <a:effectLst/>
+                        <a:latin typeface="Times New Roman" panose="02020603050405020304" pitchFamily="18" charset="0"/>
+                        <a:ea typeface="Times New Roman" panose="02020603050405020304" pitchFamily="18" charset="0"/>
+                        <a:cs typeface="Times New Roman" panose="02020603050405020304" pitchFamily="18" charset="0"/>
+                      </a:endParaRPr>
                     </a:p>
                   </a:txBody>
                   <a:tcPr marL="68580" marR="68580" marT="0" marB="0">
@@ -6571,14 +6582,20 @@
                         <a:buNone/>
                       </a:pPr>
                       <a:r>
-                        <a:rPr lang="es-ES_tradnl" sz="1100" dirty="0">
+                        <a:rPr lang="es-ES" sz="900">
                           <a:effectLst/>
                           <a:latin typeface="Times New Roman" panose="02020603050405020304" pitchFamily="18" charset="0"/>
                           <a:ea typeface="Times New Roman" panose="02020603050405020304" pitchFamily="18" charset="0"/>
                           <a:cs typeface="Times New Roman" panose="02020603050405020304" pitchFamily="18" charset="0"/>
                         </a:rPr>
-                        <a:t>26.14</a:t>
-                      </a:r>
+                        <a:t>2.48</a:t>
+                      </a:r>
+                      <a:endParaRPr lang="de-DE" sz="900">
+                        <a:effectLst/>
+                        <a:latin typeface="Times New Roman" panose="02020603050405020304" pitchFamily="18" charset="0"/>
+                        <a:ea typeface="Times New Roman" panose="02020603050405020304" pitchFamily="18" charset="0"/>
+                        <a:cs typeface="Times New Roman" panose="02020603050405020304" pitchFamily="18" charset="0"/>
+                      </a:endParaRPr>
                     </a:p>
                   </a:txBody>
                   <a:tcPr marL="68580" marR="68580" marT="0" marB="0">
@@ -6603,14 +6620,20 @@
                         <a:buNone/>
                       </a:pPr>
                       <a:r>
-                        <a:rPr lang="es-ES_tradnl" sz="1100" dirty="0">
+                        <a:rPr lang="es-ES" sz="900">
                           <a:effectLst/>
                           <a:latin typeface="Times New Roman" panose="02020603050405020304" pitchFamily="18" charset="0"/>
                           <a:ea typeface="Times New Roman" panose="02020603050405020304" pitchFamily="18" charset="0"/>
                           <a:cs typeface="Times New Roman" panose="02020603050405020304" pitchFamily="18" charset="0"/>
                         </a:rPr>
-                        <a:t>186.26</a:t>
-                      </a:r>
+                        <a:t>28.91</a:t>
+                      </a:r>
+                      <a:endParaRPr lang="de-DE" sz="900">
+                        <a:effectLst/>
+                        <a:latin typeface="Times New Roman" panose="02020603050405020304" pitchFamily="18" charset="0"/>
+                        <a:ea typeface="Times New Roman" panose="02020603050405020304" pitchFamily="18" charset="0"/>
+                        <a:cs typeface="Times New Roman" panose="02020603050405020304" pitchFamily="18" charset="0"/>
+                      </a:endParaRPr>
                     </a:p>
                   </a:txBody>
                   <a:tcPr marL="68580" marR="68580" marT="0" marB="0">
@@ -6635,14 +6658,20 @@
                         <a:buNone/>
                       </a:pPr>
                       <a:r>
-                        <a:rPr lang="es-ES_tradnl" sz="1100" dirty="0">
+                        <a:rPr lang="es-ES" sz="900">
                           <a:effectLst/>
                           <a:latin typeface="Times New Roman" panose="02020603050405020304" pitchFamily="18" charset="0"/>
                           <a:ea typeface="Times New Roman" panose="02020603050405020304" pitchFamily="18" charset="0"/>
                           <a:cs typeface="Times New Roman" panose="02020603050405020304" pitchFamily="18" charset="0"/>
                         </a:rPr>
-                        <a:t>16.93</a:t>
-                      </a:r>
+                        <a:t>12.61</a:t>
+                      </a:r>
+                      <a:endParaRPr lang="de-DE" sz="900">
+                        <a:effectLst/>
+                        <a:latin typeface="Times New Roman" panose="02020603050405020304" pitchFamily="18" charset="0"/>
+                        <a:ea typeface="Times New Roman" panose="02020603050405020304" pitchFamily="18" charset="0"/>
+                        <a:cs typeface="Times New Roman" panose="02020603050405020304" pitchFamily="18" charset="0"/>
+                      </a:endParaRPr>
                     </a:p>
                   </a:txBody>
                   <a:tcPr marL="68580" marR="68580" marT="0" marB="0">
@@ -6667,14 +6696,20 @@
                         <a:buNone/>
                       </a:pPr>
                       <a:r>
-                        <a:rPr lang="es-ES_tradnl" sz="1100" dirty="0">
+                        <a:rPr lang="es-ES" sz="900">
                           <a:effectLst/>
                           <a:latin typeface="Times New Roman" panose="02020603050405020304" pitchFamily="18" charset="0"/>
                           <a:ea typeface="Times New Roman" panose="02020603050405020304" pitchFamily="18" charset="0"/>
                           <a:cs typeface="Times New Roman" panose="02020603050405020304" pitchFamily="18" charset="0"/>
                         </a:rPr>
-                        <a:t>168.98</a:t>
-                      </a:r>
+                        <a:t>10.81</a:t>
+                      </a:r>
+                      <a:endParaRPr lang="de-DE" sz="900">
+                        <a:effectLst/>
+                        <a:latin typeface="Times New Roman" panose="02020603050405020304" pitchFamily="18" charset="0"/>
+                        <a:ea typeface="Times New Roman" panose="02020603050405020304" pitchFamily="18" charset="0"/>
+                        <a:cs typeface="Times New Roman" panose="02020603050405020304" pitchFamily="18" charset="0"/>
+                      </a:endParaRPr>
                     </a:p>
                   </a:txBody>
                   <a:tcPr marL="68580" marR="68580" marT="0" marB="0">
@@ -6732,7 +6767,7 @@
                         <a:buNone/>
                       </a:pPr>
                       <a:r>
-                        <a:rPr lang="es-ES_tradnl" sz="1100" dirty="0">
+                        <a:rPr lang="es-ES_tradnl" sz="900" dirty="0">
                           <a:effectLst/>
                           <a:latin typeface="Times New Roman" panose="02020603050405020304" pitchFamily="18" charset="0"/>
                           <a:ea typeface="Times New Roman" panose="02020603050405020304" pitchFamily="18" charset="0"/>
@@ -6755,7 +6790,7 @@
                         <a:buNone/>
                       </a:pPr>
                       <a:r>
-                        <a:rPr lang="es-ES_tradnl" sz="1100" dirty="0">
+                        <a:rPr lang="es-ES_tradnl" sz="900" dirty="0">
                           <a:effectLst/>
                           <a:latin typeface="Times New Roman" panose="02020603050405020304" pitchFamily="18" charset="0"/>
                           <a:ea typeface="Times New Roman" panose="02020603050405020304" pitchFamily="18" charset="0"/>
@@ -6778,7 +6813,7 @@
                         <a:buNone/>
                       </a:pPr>
                       <a:r>
-                        <a:rPr lang="es-ES_tradnl" sz="1100" dirty="0">
+                        <a:rPr lang="es-ES_tradnl" sz="900" dirty="0">
                           <a:effectLst/>
                           <a:latin typeface="Times New Roman" panose="02020603050405020304" pitchFamily="18" charset="0"/>
                           <a:ea typeface="Times New Roman" panose="02020603050405020304" pitchFamily="18" charset="0"/>
@@ -6801,7 +6836,7 @@
                         <a:buNone/>
                       </a:pPr>
                       <a:r>
-                        <a:rPr lang="es-ES_tradnl" sz="1100" dirty="0">
+                        <a:rPr lang="es-ES_tradnl" sz="900" dirty="0">
                           <a:effectLst/>
                           <a:latin typeface="Times New Roman" panose="02020603050405020304" pitchFamily="18" charset="0"/>
                           <a:ea typeface="Times New Roman" panose="02020603050405020304" pitchFamily="18" charset="0"/>
@@ -6824,7 +6859,7 @@
                         <a:buNone/>
                       </a:pPr>
                       <a:r>
-                        <a:rPr lang="es-ES_tradnl" sz="1100" dirty="0">
+                        <a:rPr lang="es-ES_tradnl" sz="900" dirty="0">
                           <a:effectLst/>
                           <a:latin typeface="Times New Roman" panose="02020603050405020304" pitchFamily="18" charset="0"/>
                           <a:ea typeface="Times New Roman" panose="02020603050405020304" pitchFamily="18" charset="0"/>
@@ -6847,7 +6882,7 @@
                         <a:buNone/>
                       </a:pPr>
                       <a:r>
-                        <a:rPr lang="es-ES_tradnl" sz="1100" dirty="0">
+                        <a:rPr lang="es-ES_tradnl" sz="900" dirty="0">
                           <a:effectLst/>
                           <a:latin typeface="Times New Roman" panose="02020603050405020304" pitchFamily="18" charset="0"/>
                           <a:ea typeface="Times New Roman" panose="02020603050405020304" pitchFamily="18" charset="0"/>
@@ -6870,7 +6905,7 @@
                         <a:buNone/>
                       </a:pPr>
                       <a:r>
-                        <a:rPr lang="es-ES_tradnl" sz="1100" dirty="0">
+                        <a:rPr lang="es-ES_tradnl" sz="900" dirty="0">
                           <a:effectLst/>
                           <a:latin typeface="Times New Roman" panose="02020603050405020304" pitchFamily="18" charset="0"/>
                           <a:ea typeface="Times New Roman" panose="02020603050405020304" pitchFamily="18" charset="0"/>
@@ -6893,7 +6928,7 @@
                         <a:buNone/>
                       </a:pPr>
                       <a:r>
-                        <a:rPr lang="es-ES_tradnl" sz="1100" dirty="0">
+                        <a:rPr lang="es-ES_tradnl" sz="900" dirty="0">
                           <a:effectLst/>
                           <a:latin typeface="Times New Roman" panose="02020603050405020304" pitchFamily="18" charset="0"/>
                           <a:ea typeface="Times New Roman" panose="02020603050405020304" pitchFamily="18" charset="0"/>
@@ -6916,7 +6951,7 @@
                         <a:buNone/>
                       </a:pPr>
                       <a:r>
-                        <a:rPr lang="es-ES_tradnl" sz="1100" dirty="0">
+                        <a:rPr lang="es-ES_tradnl" sz="900" dirty="0">
                           <a:effectLst/>
                           <a:latin typeface="Times New Roman" panose="02020603050405020304" pitchFamily="18" charset="0"/>
                           <a:ea typeface="Times New Roman" panose="02020603050405020304" pitchFamily="18" charset="0"/>
@@ -6939,7 +6974,7 @@
                         <a:buNone/>
                       </a:pPr>
                       <a:r>
-                        <a:rPr lang="es-ES_tradnl" sz="1100" dirty="0">
+                        <a:rPr lang="es-ES_tradnl" sz="900" dirty="0">
                           <a:effectLst/>
                           <a:latin typeface="Times New Roman" panose="02020603050405020304" pitchFamily="18" charset="0"/>
                           <a:ea typeface="Times New Roman" panose="02020603050405020304" pitchFamily="18" charset="0"/>
@@ -6962,106 +6997,136 @@
                         <a:buNone/>
                       </a:pPr>
                       <a:r>
-                        <a:rPr lang="es-ES_tradnl" sz="1100" dirty="0">
+                        <a:rPr lang="es-ES" sz="900">
                           <a:effectLst/>
                           <a:latin typeface="Times New Roman" panose="02020603050405020304" pitchFamily="18" charset="0"/>
                           <a:ea typeface="Times New Roman" panose="02020603050405020304" pitchFamily="18" charset="0"/>
                           <a:cs typeface="Times New Roman" panose="02020603050405020304" pitchFamily="18" charset="0"/>
                         </a:rPr>
-                        <a:t>161.01</a:t>
-                      </a:r>
-                    </a:p>
-                  </a:txBody>
-                  <a:tcPr marL="68580" marR="68580" marT="0" marB="0">
-                    <a:noFill/>
-                  </a:tcPr>
-                </a:tc>
-                <a:tc>
-                  <a:txBody>
-                    <a:bodyPr/>
-                    <a:lstStyle/>
-                    <a:p>
-                      <a:pPr algn="ctr">
-                        <a:buNone/>
-                      </a:pPr>
-                      <a:r>
-                        <a:rPr lang="es-ES_tradnl" sz="1100" dirty="0">
+                        <a:t>6.00</a:t>
+                      </a:r>
+                      <a:endParaRPr lang="de-DE" sz="900">
+                        <a:effectLst/>
+                        <a:latin typeface="Times New Roman" panose="02020603050405020304" pitchFamily="18" charset="0"/>
+                        <a:ea typeface="Times New Roman" panose="02020603050405020304" pitchFamily="18" charset="0"/>
+                        <a:cs typeface="Times New Roman" panose="02020603050405020304" pitchFamily="18" charset="0"/>
+                      </a:endParaRPr>
+                    </a:p>
+                  </a:txBody>
+                  <a:tcPr marL="68580" marR="68580" marT="0" marB="0">
+                    <a:noFill/>
+                  </a:tcPr>
+                </a:tc>
+                <a:tc>
+                  <a:txBody>
+                    <a:bodyPr/>
+                    <a:lstStyle/>
+                    <a:p>
+                      <a:pPr algn="ctr">
+                        <a:buNone/>
+                      </a:pPr>
+                      <a:r>
+                        <a:rPr lang="es-ES" sz="900">
                           <a:effectLst/>
                           <a:latin typeface="Times New Roman" panose="02020603050405020304" pitchFamily="18" charset="0"/>
                           <a:ea typeface="Times New Roman" panose="02020603050405020304" pitchFamily="18" charset="0"/>
                           <a:cs typeface="Times New Roman" panose="02020603050405020304" pitchFamily="18" charset="0"/>
                         </a:rPr>
-                        <a:t>29.13</a:t>
-                      </a:r>
-                    </a:p>
-                  </a:txBody>
-                  <a:tcPr marL="68580" marR="68580" marT="0" marB="0">
-                    <a:noFill/>
-                  </a:tcPr>
-                </a:tc>
-                <a:tc>
-                  <a:txBody>
-                    <a:bodyPr/>
-                    <a:lstStyle/>
-                    <a:p>
-                      <a:pPr algn="ctr">
-                        <a:buNone/>
-                      </a:pPr>
-                      <a:r>
-                        <a:rPr lang="es-ES_tradnl" sz="1100" dirty="0">
+                        <a:t>2.76</a:t>
+                      </a:r>
+                      <a:endParaRPr lang="de-DE" sz="900">
+                        <a:effectLst/>
+                        <a:latin typeface="Times New Roman" panose="02020603050405020304" pitchFamily="18" charset="0"/>
+                        <a:ea typeface="Times New Roman" panose="02020603050405020304" pitchFamily="18" charset="0"/>
+                        <a:cs typeface="Times New Roman" panose="02020603050405020304" pitchFamily="18" charset="0"/>
+                      </a:endParaRPr>
+                    </a:p>
+                  </a:txBody>
+                  <a:tcPr marL="68580" marR="68580" marT="0" marB="0">
+                    <a:noFill/>
+                  </a:tcPr>
+                </a:tc>
+                <a:tc>
+                  <a:txBody>
+                    <a:bodyPr/>
+                    <a:lstStyle/>
+                    <a:p>
+                      <a:pPr algn="ctr">
+                        <a:buNone/>
+                      </a:pPr>
+                      <a:r>
+                        <a:rPr lang="es-ES" sz="900">
                           <a:effectLst/>
                           <a:latin typeface="Times New Roman" panose="02020603050405020304" pitchFamily="18" charset="0"/>
                           <a:ea typeface="Times New Roman" panose="02020603050405020304" pitchFamily="18" charset="0"/>
                           <a:cs typeface="Times New Roman" panose="02020603050405020304" pitchFamily="18" charset="0"/>
                         </a:rPr>
-                        <a:t>190.63</a:t>
-                      </a:r>
-                    </a:p>
-                  </a:txBody>
-                  <a:tcPr marL="68580" marR="68580" marT="0" marB="0">
-                    <a:noFill/>
-                  </a:tcPr>
-                </a:tc>
-                <a:tc>
-                  <a:txBody>
-                    <a:bodyPr/>
-                    <a:lstStyle/>
-                    <a:p>
-                      <a:pPr algn="ctr">
-                        <a:buNone/>
-                      </a:pPr>
-                      <a:r>
-                        <a:rPr lang="es-ES_tradnl" sz="1100" dirty="0">
+                        <a:t>35.64</a:t>
+                      </a:r>
+                      <a:endParaRPr lang="de-DE" sz="900">
+                        <a:effectLst/>
+                        <a:latin typeface="Times New Roman" panose="02020603050405020304" pitchFamily="18" charset="0"/>
+                        <a:ea typeface="Times New Roman" panose="02020603050405020304" pitchFamily="18" charset="0"/>
+                        <a:cs typeface="Times New Roman" panose="02020603050405020304" pitchFamily="18" charset="0"/>
+                      </a:endParaRPr>
+                    </a:p>
+                  </a:txBody>
+                  <a:tcPr marL="68580" marR="68580" marT="0" marB="0">
+                    <a:noFill/>
+                  </a:tcPr>
+                </a:tc>
+                <a:tc>
+                  <a:txBody>
+                    <a:bodyPr/>
+                    <a:lstStyle/>
+                    <a:p>
+                      <a:pPr algn="ctr">
+                        <a:buNone/>
+                      </a:pPr>
+                      <a:r>
+                        <a:rPr lang="es-ES" sz="900">
                           <a:effectLst/>
                           <a:latin typeface="Times New Roman" panose="02020603050405020304" pitchFamily="18" charset="0"/>
                           <a:ea typeface="Times New Roman" panose="02020603050405020304" pitchFamily="18" charset="0"/>
                           <a:cs typeface="Times New Roman" panose="02020603050405020304" pitchFamily="18" charset="0"/>
                         </a:rPr>
-                        <a:t>17.93</a:t>
-                      </a:r>
-                    </a:p>
-                  </a:txBody>
-                  <a:tcPr marL="68580" marR="68580" marT="0" marB="0">
-                    <a:noFill/>
-                  </a:tcPr>
-                </a:tc>
-                <a:tc>
-                  <a:txBody>
-                    <a:bodyPr/>
-                    <a:lstStyle/>
-                    <a:p>
-                      <a:pPr algn="ctr">
-                        <a:buNone/>
-                      </a:pPr>
-                      <a:r>
-                        <a:rPr lang="es-ES_tradnl" sz="1100" dirty="0">
+                        <a:t>14.43</a:t>
+                      </a:r>
+                      <a:endParaRPr lang="de-DE" sz="900">
+                        <a:effectLst/>
+                        <a:latin typeface="Times New Roman" panose="02020603050405020304" pitchFamily="18" charset="0"/>
+                        <a:ea typeface="Times New Roman" panose="02020603050405020304" pitchFamily="18" charset="0"/>
+                        <a:cs typeface="Times New Roman" panose="02020603050405020304" pitchFamily="18" charset="0"/>
+                      </a:endParaRPr>
+                    </a:p>
+                  </a:txBody>
+                  <a:tcPr marL="68580" marR="68580" marT="0" marB="0">
+                    <a:noFill/>
+                  </a:tcPr>
+                </a:tc>
+                <a:tc>
+                  <a:txBody>
+                    <a:bodyPr/>
+                    <a:lstStyle/>
+                    <a:p>
+                      <a:pPr algn="ctr">
+                        <a:buNone/>
+                      </a:pPr>
+                      <a:r>
+                        <a:rPr lang="es-ES" sz="900">
                           <a:effectLst/>
                           <a:latin typeface="Times New Roman" panose="02020603050405020304" pitchFamily="18" charset="0"/>
                           <a:ea typeface="Times New Roman" panose="02020603050405020304" pitchFamily="18" charset="0"/>
                           <a:cs typeface="Times New Roman" panose="02020603050405020304" pitchFamily="18" charset="0"/>
                         </a:rPr>
-                        <a:t>160.04</a:t>
-                      </a:r>
+                        <a:t>4.57</a:t>
+                      </a:r>
+                      <a:endParaRPr lang="de-DE" sz="900">
+                        <a:effectLst/>
+                        <a:latin typeface="Times New Roman" panose="02020603050405020304" pitchFamily="18" charset="0"/>
+                        <a:ea typeface="Times New Roman" panose="02020603050405020304" pitchFamily="18" charset="0"/>
+                        <a:cs typeface="Times New Roman" panose="02020603050405020304" pitchFamily="18" charset="0"/>
+                      </a:endParaRPr>
                     </a:p>
                   </a:txBody>
                   <a:tcPr marL="68580" marR="68580" marT="0" marB="0">
@@ -7110,7 +7175,7 @@
                         <a:buNone/>
                       </a:pPr>
                       <a:r>
-                        <a:rPr lang="es-ES_tradnl" sz="1100" dirty="0">
+                        <a:rPr lang="es-ES_tradnl" sz="900" dirty="0">
                           <a:effectLst/>
                           <a:latin typeface="Times New Roman" panose="02020603050405020304" pitchFamily="18" charset="0"/>
                           <a:ea typeface="Times New Roman" panose="02020603050405020304" pitchFamily="18" charset="0"/>
@@ -7133,7 +7198,7 @@
                         <a:buNone/>
                       </a:pPr>
                       <a:r>
-                        <a:rPr lang="es-ES_tradnl" sz="1100" dirty="0">
+                        <a:rPr lang="es-ES_tradnl" sz="900" dirty="0">
                           <a:effectLst/>
                           <a:latin typeface="Times New Roman" panose="02020603050405020304" pitchFamily="18" charset="0"/>
                           <a:ea typeface="Times New Roman" panose="02020603050405020304" pitchFamily="18" charset="0"/>
@@ -7156,7 +7221,7 @@
                         <a:buNone/>
                       </a:pPr>
                       <a:r>
-                        <a:rPr lang="es-ES_tradnl" sz="1100" dirty="0">
+                        <a:rPr lang="es-ES_tradnl" sz="900" dirty="0">
                           <a:effectLst/>
                           <a:latin typeface="Times New Roman" panose="02020603050405020304" pitchFamily="18" charset="0"/>
                           <a:ea typeface="Times New Roman" panose="02020603050405020304" pitchFamily="18" charset="0"/>
@@ -7179,7 +7244,7 @@
                         <a:buNone/>
                       </a:pPr>
                       <a:r>
-                        <a:rPr lang="es-ES_tradnl" sz="1100" dirty="0">
+                        <a:rPr lang="es-ES_tradnl" sz="900" dirty="0">
                           <a:effectLst/>
                           <a:latin typeface="Times New Roman" panose="02020603050405020304" pitchFamily="18" charset="0"/>
                           <a:ea typeface="Times New Roman" panose="02020603050405020304" pitchFamily="18" charset="0"/>
@@ -7202,7 +7267,7 @@
                         <a:buNone/>
                       </a:pPr>
                       <a:r>
-                        <a:rPr lang="es-ES_tradnl" sz="1100" dirty="0">
+                        <a:rPr lang="es-ES_tradnl" sz="900" dirty="0">
                           <a:effectLst/>
                           <a:latin typeface="Times New Roman" panose="02020603050405020304" pitchFamily="18" charset="0"/>
                           <a:ea typeface="Times New Roman" panose="02020603050405020304" pitchFamily="18" charset="0"/>
@@ -7225,7 +7290,7 @@
                         <a:buNone/>
                       </a:pPr>
                       <a:r>
-                        <a:rPr lang="es-ES_tradnl" sz="1100" dirty="0">
+                        <a:rPr lang="es-ES_tradnl" sz="900" dirty="0">
                           <a:effectLst/>
                           <a:latin typeface="Times New Roman" panose="02020603050405020304" pitchFamily="18" charset="0"/>
                           <a:ea typeface="Times New Roman" panose="02020603050405020304" pitchFamily="18" charset="0"/>
@@ -7248,7 +7313,7 @@
                         <a:buNone/>
                       </a:pPr>
                       <a:r>
-                        <a:rPr lang="es-ES_tradnl" sz="1100" dirty="0">
+                        <a:rPr lang="es-ES_tradnl" sz="900" dirty="0">
                           <a:effectLst/>
                           <a:latin typeface="Times New Roman" panose="02020603050405020304" pitchFamily="18" charset="0"/>
                           <a:ea typeface="Times New Roman" panose="02020603050405020304" pitchFamily="18" charset="0"/>
@@ -7271,7 +7336,7 @@
                         <a:buNone/>
                       </a:pPr>
                       <a:r>
-                        <a:rPr lang="es-ES_tradnl" sz="1100" dirty="0">
+                        <a:rPr lang="es-ES_tradnl" sz="900" dirty="0">
                           <a:effectLst/>
                           <a:latin typeface="Times New Roman" panose="02020603050405020304" pitchFamily="18" charset="0"/>
                           <a:ea typeface="Times New Roman" panose="02020603050405020304" pitchFamily="18" charset="0"/>
@@ -7294,7 +7359,7 @@
                         <a:buNone/>
                       </a:pPr>
                       <a:r>
-                        <a:rPr lang="es-ES_tradnl" sz="1100" dirty="0">
+                        <a:rPr lang="es-ES_tradnl" sz="900" dirty="0">
                           <a:effectLst/>
                           <a:latin typeface="Times New Roman" panose="02020603050405020304" pitchFamily="18" charset="0"/>
                           <a:ea typeface="Times New Roman" panose="02020603050405020304" pitchFamily="18" charset="0"/>
@@ -7317,7 +7382,7 @@
                         <a:buNone/>
                       </a:pPr>
                       <a:r>
-                        <a:rPr lang="es-ES_tradnl" sz="1100" dirty="0">
+                        <a:rPr lang="es-ES_tradnl" sz="900" dirty="0">
                           <a:effectLst/>
                           <a:latin typeface="Times New Roman" panose="02020603050405020304" pitchFamily="18" charset="0"/>
                           <a:ea typeface="Times New Roman" panose="02020603050405020304" pitchFamily="18" charset="0"/>
@@ -7340,106 +7405,136 @@
                         <a:buNone/>
                       </a:pPr>
                       <a:r>
-                        <a:rPr lang="es-ES_tradnl" sz="1100" dirty="0">
+                        <a:rPr lang="es-ES" sz="900">
                           <a:effectLst/>
                           <a:latin typeface="Times New Roman" panose="02020603050405020304" pitchFamily="18" charset="0"/>
                           <a:ea typeface="Times New Roman" panose="02020603050405020304" pitchFamily="18" charset="0"/>
                           <a:cs typeface="Times New Roman" panose="02020603050405020304" pitchFamily="18" charset="0"/>
                         </a:rPr>
-                        <a:t>483.02</a:t>
-                      </a:r>
-                    </a:p>
-                  </a:txBody>
-                  <a:tcPr marL="68580" marR="68580" marT="0" marB="0">
-                    <a:noFill/>
-                  </a:tcPr>
-                </a:tc>
-                <a:tc>
-                  <a:txBody>
-                    <a:bodyPr/>
-                    <a:lstStyle/>
-                    <a:p>
-                      <a:pPr algn="ctr">
-                        <a:buNone/>
-                      </a:pPr>
-                      <a:r>
-                        <a:rPr lang="es-ES_tradnl" sz="1100" dirty="0">
+                        <a:t>6.00</a:t>
+                      </a:r>
+                      <a:endParaRPr lang="de-DE" sz="900">
+                        <a:effectLst/>
+                        <a:latin typeface="Times New Roman" panose="02020603050405020304" pitchFamily="18" charset="0"/>
+                        <a:ea typeface="Times New Roman" panose="02020603050405020304" pitchFamily="18" charset="0"/>
+                        <a:cs typeface="Times New Roman" panose="02020603050405020304" pitchFamily="18" charset="0"/>
+                      </a:endParaRPr>
+                    </a:p>
+                  </a:txBody>
+                  <a:tcPr marL="68580" marR="68580" marT="0" marB="0">
+                    <a:noFill/>
+                  </a:tcPr>
+                </a:tc>
+                <a:tc>
+                  <a:txBody>
+                    <a:bodyPr/>
+                    <a:lstStyle/>
+                    <a:p>
+                      <a:pPr algn="ctr">
+                        <a:buNone/>
+                      </a:pPr>
+                      <a:r>
+                        <a:rPr lang="es-ES" sz="900">
                           <a:effectLst/>
                           <a:latin typeface="Times New Roman" panose="02020603050405020304" pitchFamily="18" charset="0"/>
                           <a:ea typeface="Times New Roman" panose="02020603050405020304" pitchFamily="18" charset="0"/>
                           <a:cs typeface="Times New Roman" panose="02020603050405020304" pitchFamily="18" charset="0"/>
                         </a:rPr>
-                        <a:t>88.25</a:t>
-                      </a:r>
-                    </a:p>
-                  </a:txBody>
-                  <a:tcPr marL="68580" marR="68580" marT="0" marB="0">
-                    <a:noFill/>
-                  </a:tcPr>
-                </a:tc>
-                <a:tc>
-                  <a:txBody>
-                    <a:bodyPr/>
-                    <a:lstStyle/>
-                    <a:p>
-                      <a:pPr algn="ctr">
-                        <a:buNone/>
-                      </a:pPr>
-                      <a:r>
-                        <a:rPr lang="es-ES_tradnl" sz="1100" dirty="0">
+                        <a:t>3.29</a:t>
+                      </a:r>
+                      <a:endParaRPr lang="de-DE" sz="900">
+                        <a:effectLst/>
+                        <a:latin typeface="Times New Roman" panose="02020603050405020304" pitchFamily="18" charset="0"/>
+                        <a:ea typeface="Times New Roman" panose="02020603050405020304" pitchFamily="18" charset="0"/>
+                        <a:cs typeface="Times New Roman" panose="02020603050405020304" pitchFamily="18" charset="0"/>
+                      </a:endParaRPr>
+                    </a:p>
+                  </a:txBody>
+                  <a:tcPr marL="68580" marR="68580" marT="0" marB="0">
+                    <a:noFill/>
+                  </a:tcPr>
+                </a:tc>
+                <a:tc>
+                  <a:txBody>
+                    <a:bodyPr/>
+                    <a:lstStyle/>
+                    <a:p>
+                      <a:pPr algn="ctr">
+                        <a:buNone/>
+                      </a:pPr>
+                      <a:r>
+                        <a:rPr lang="es-ES" sz="900">
                           <a:effectLst/>
                           <a:latin typeface="Times New Roman" panose="02020603050405020304" pitchFamily="18" charset="0"/>
                           <a:ea typeface="Times New Roman" panose="02020603050405020304" pitchFamily="18" charset="0"/>
                           <a:cs typeface="Times New Roman" panose="02020603050405020304" pitchFamily="18" charset="0"/>
                         </a:rPr>
-                        <a:t>1409.19</a:t>
-                      </a:r>
-                    </a:p>
-                  </a:txBody>
-                  <a:tcPr marL="68580" marR="68580" marT="0" marB="0">
-                    <a:noFill/>
-                  </a:tcPr>
-                </a:tc>
-                <a:tc>
-                  <a:txBody>
-                    <a:bodyPr/>
-                    <a:lstStyle/>
-                    <a:p>
-                      <a:pPr algn="ctr">
-                        <a:buNone/>
-                      </a:pPr>
-                      <a:r>
-                        <a:rPr lang="es-ES_tradnl" sz="1100" dirty="0">
+                        <a:t>58.24</a:t>
+                      </a:r>
+                      <a:endParaRPr lang="de-DE" sz="900">
+                        <a:effectLst/>
+                        <a:latin typeface="Times New Roman" panose="02020603050405020304" pitchFamily="18" charset="0"/>
+                        <a:ea typeface="Times New Roman" panose="02020603050405020304" pitchFamily="18" charset="0"/>
+                        <a:cs typeface="Times New Roman" panose="02020603050405020304" pitchFamily="18" charset="0"/>
+                      </a:endParaRPr>
+                    </a:p>
+                  </a:txBody>
+                  <a:tcPr marL="68580" marR="68580" marT="0" marB="0">
+                    <a:noFill/>
+                  </a:tcPr>
+                </a:tc>
+                <a:tc>
+                  <a:txBody>
+                    <a:bodyPr/>
+                    <a:lstStyle/>
+                    <a:p>
+                      <a:pPr algn="ctr">
+                        <a:buNone/>
+                      </a:pPr>
+                      <a:r>
+                        <a:rPr lang="es-ES" sz="900">
                           <a:effectLst/>
                           <a:latin typeface="Times New Roman" panose="02020603050405020304" pitchFamily="18" charset="0"/>
                           <a:ea typeface="Times New Roman" panose="02020603050405020304" pitchFamily="18" charset="0"/>
                           <a:cs typeface="Times New Roman" panose="02020603050405020304" pitchFamily="18" charset="0"/>
                         </a:rPr>
-                        <a:t>23.48</a:t>
-                      </a:r>
-                    </a:p>
-                  </a:txBody>
-                  <a:tcPr marL="68580" marR="68580" marT="0" marB="0">
-                    <a:noFill/>
-                  </a:tcPr>
-                </a:tc>
-                <a:tc>
-                  <a:txBody>
-                    <a:bodyPr/>
-                    <a:lstStyle/>
-                    <a:p>
-                      <a:pPr algn="ctr">
-                        <a:buNone/>
-                      </a:pPr>
-                      <a:r>
-                        <a:rPr lang="es-ES_tradnl" sz="1100" dirty="0">
+                        <a:t>16.21</a:t>
+                      </a:r>
+                      <a:endParaRPr lang="de-DE" sz="900">
+                        <a:effectLst/>
+                        <a:latin typeface="Times New Roman" panose="02020603050405020304" pitchFamily="18" charset="0"/>
+                        <a:ea typeface="Times New Roman" panose="02020603050405020304" pitchFamily="18" charset="0"/>
+                        <a:cs typeface="Times New Roman" panose="02020603050405020304" pitchFamily="18" charset="0"/>
+                      </a:endParaRPr>
+                    </a:p>
+                  </a:txBody>
+                  <a:tcPr marL="68580" marR="68580" marT="0" marB="0">
+                    <a:noFill/>
+                  </a:tcPr>
+                </a:tc>
+                <a:tc>
+                  <a:txBody>
+                    <a:bodyPr/>
+                    <a:lstStyle/>
+                    <a:p>
+                      <a:pPr algn="ctr">
+                        <a:buNone/>
+                      </a:pPr>
+                      <a:r>
+                        <a:rPr lang="es-ES" sz="900" dirty="0">
                           <a:effectLst/>
                           <a:latin typeface="Times New Roman" panose="02020603050405020304" pitchFamily="18" charset="0"/>
                           <a:ea typeface="Times New Roman" panose="02020603050405020304" pitchFamily="18" charset="0"/>
                           <a:cs typeface="Times New Roman" panose="02020603050405020304" pitchFamily="18" charset="0"/>
                         </a:rPr>
-                        <a:t>492.26</a:t>
-                      </a:r>
+                        <a:t>11.84</a:t>
+                      </a:r>
+                      <a:endParaRPr lang="de-DE" sz="900" dirty="0">
+                        <a:effectLst/>
+                        <a:latin typeface="Times New Roman" panose="02020603050405020304" pitchFamily="18" charset="0"/>
+                        <a:ea typeface="Times New Roman" panose="02020603050405020304" pitchFamily="18" charset="0"/>
+                        <a:cs typeface="Times New Roman" panose="02020603050405020304" pitchFamily="18" charset="0"/>
+                      </a:endParaRPr>
                     </a:p>
                   </a:txBody>
                   <a:tcPr marL="68580" marR="68580" marT="0" marB="0">
@@ -8650,38 +8745,6 @@
           </a:p>
         </p:txBody>
       </p:sp>
-      <p:pic>
-        <p:nvPicPr>
-          <p:cNvPr id="14" name="Onlinebild-Platzhalter 13">
-            <a:extLst>
-              <a:ext uri="{FF2B5EF4-FFF2-40B4-BE49-F238E27FC236}">
-                <a16:creationId xmlns:a16="http://schemas.microsoft.com/office/drawing/2014/main" id="{080015F6-2AE3-061D-0430-B31637B73715}"/>
-              </a:ext>
-            </a:extLst>
-          </p:cNvPr>
-          <p:cNvPicPr>
-            <a:picLocks noGrp="1" noChangeAspect="1"/>
-          </p:cNvPicPr>
-          <p:nvPr>
-            <p:ph type="clipArt" sz="quarter" idx="15"/>
-          </p:nvPr>
-        </p:nvPicPr>
-        <p:blipFill>
-          <a:blip r:embed="rId2"/>
-          <a:stretch>
-            <a:fillRect/>
-          </a:stretch>
-        </p:blipFill>
-        <p:spPr>
-          <a:xfrm>
-            <a:off x="583920" y="2151063"/>
-            <a:ext cx="5239310" cy="4008437"/>
-          </a:xfrm>
-          <a:prstGeom prst="rect">
-            <a:avLst/>
-          </a:prstGeom>
-        </p:spPr>
-      </p:pic>
       <p:sp>
         <p:nvSpPr>
           <p:cNvPr id="4" name="Fußzeilenplatzhalter 2">
@@ -8811,6 +8874,38 @@
           </a:p>
         </p:txBody>
       </p:sp>
+      <p:pic>
+        <p:nvPicPr>
+          <p:cNvPr id="8" name="Onlinebild-Platzhalter 7">
+            <a:extLst>
+              <a:ext uri="{FF2B5EF4-FFF2-40B4-BE49-F238E27FC236}">
+                <a16:creationId xmlns:a16="http://schemas.microsoft.com/office/drawing/2014/main" id="{72362894-FA6B-B9C2-852B-5DD4EB4D0285}"/>
+              </a:ext>
+            </a:extLst>
+          </p:cNvPr>
+          <p:cNvPicPr>
+            <a:picLocks noGrp="1" noChangeAspect="1"/>
+          </p:cNvPicPr>
+          <p:nvPr>
+            <p:ph type="clipArt" sz="quarter" idx="15"/>
+          </p:nvPr>
+        </p:nvPicPr>
+        <p:blipFill>
+          <a:blip r:embed="rId2"/>
+          <a:stretch>
+            <a:fillRect/>
+          </a:stretch>
+        </p:blipFill>
+        <p:spPr>
+          <a:xfrm>
+            <a:off x="583920" y="2151063"/>
+            <a:ext cx="5239310" cy="4008437"/>
+          </a:xfrm>
+          <a:prstGeom prst="rect">
+            <a:avLst/>
+          </a:prstGeom>
+        </p:spPr>
+      </p:pic>
     </p:spTree>
     <p:extLst>
       <p:ext uri="{BB962C8B-B14F-4D97-AF65-F5344CB8AC3E}">
@@ -8901,14 +8996,14 @@
             <p:ph sz="quarter" idx="14"/>
             <p:extLst>
               <p:ext uri="{D42A27DB-BD31-4B8C-83A1-F6EECF244321}">
-                <p14:modId xmlns:p14="http://schemas.microsoft.com/office/powerpoint/2010/main" val="1550770265"/>
+                <p14:modId xmlns:p14="http://schemas.microsoft.com/office/powerpoint/2010/main" val="276472325"/>
               </p:ext>
             </p:extLst>
           </p:nvPr>
         </p:nvGraphicFramePr>
         <p:xfrm>
           <a:off x="815975" y="4749800"/>
-          <a:ext cx="10532960" cy="1210945"/>
+          <a:ext cx="10532960" cy="963495"/>
         </p:xfrm>
         <a:graphic>
           <a:graphicData uri="http://schemas.openxmlformats.org/drawingml/2006/table">
@@ -9030,7 +9125,7 @@
                   </a:extLst>
                 </a:gridCol>
               </a:tblGrid>
-              <a:tr h="185420">
+              <a:tr h="220416">
                 <a:tc>
                   <a:txBody>
                     <a:bodyPr/>
@@ -9878,7 +9973,7 @@
                   </a:ext>
                 </a:extLst>
               </a:tr>
-              <a:tr h="194945">
+              <a:tr h="140535">
                 <a:tc>
                   <a:txBody>
                     <a:bodyPr/>
@@ -9931,7 +10026,7 @@
                         <a:buNone/>
                       </a:pPr>
                       <a:r>
-                        <a:rPr lang="es-ES_tradnl" sz="1100" dirty="0">
+                        <a:rPr lang="es-ES_tradnl" sz="900" dirty="0">
                           <a:effectLst/>
                           <a:latin typeface="Times New Roman" panose="02020603050405020304" pitchFamily="18" charset="0"/>
                           <a:ea typeface="Times New Roman" panose="02020603050405020304" pitchFamily="18" charset="0"/>
@@ -9963,7 +10058,7 @@
                         <a:buNone/>
                       </a:pPr>
                       <a:r>
-                        <a:rPr lang="es-ES_tradnl" sz="1100" dirty="0">
+                        <a:rPr lang="es-ES_tradnl" sz="900" dirty="0">
                           <a:effectLst/>
                           <a:latin typeface="Times New Roman" panose="02020603050405020304" pitchFamily="18" charset="0"/>
                           <a:ea typeface="Times New Roman" panose="02020603050405020304" pitchFamily="18" charset="0"/>
@@ -9995,7 +10090,7 @@
                         <a:buNone/>
                       </a:pPr>
                       <a:r>
-                        <a:rPr lang="es-ES_tradnl" sz="1100" dirty="0">
+                        <a:rPr lang="es-ES_tradnl" sz="900" dirty="0">
                           <a:effectLst/>
                           <a:latin typeface="Times New Roman" panose="02020603050405020304" pitchFamily="18" charset="0"/>
                           <a:ea typeface="Times New Roman" panose="02020603050405020304" pitchFamily="18" charset="0"/>
@@ -10027,7 +10122,7 @@
                         <a:buNone/>
                       </a:pPr>
                       <a:r>
-                        <a:rPr lang="es-ES_tradnl" sz="1100" dirty="0">
+                        <a:rPr lang="es-ES_tradnl" sz="900" dirty="0">
                           <a:effectLst/>
                           <a:latin typeface="Times New Roman" panose="02020603050405020304" pitchFamily="18" charset="0"/>
                           <a:ea typeface="Times New Roman" panose="02020603050405020304" pitchFamily="18" charset="0"/>
@@ -10059,7 +10154,7 @@
                         <a:buNone/>
                       </a:pPr>
                       <a:r>
-                        <a:rPr lang="es-ES_tradnl" sz="1100" dirty="0">
+                        <a:rPr lang="es-ES_tradnl" sz="900" dirty="0">
                           <a:effectLst/>
                           <a:latin typeface="Times New Roman" panose="02020603050405020304" pitchFamily="18" charset="0"/>
                           <a:ea typeface="Times New Roman" panose="02020603050405020304" pitchFamily="18" charset="0"/>
@@ -10091,7 +10186,7 @@
                         <a:buNone/>
                       </a:pPr>
                       <a:r>
-                        <a:rPr lang="es-ES_tradnl" sz="1100" dirty="0">
+                        <a:rPr lang="es-ES_tradnl" sz="900" dirty="0">
                           <a:effectLst/>
                           <a:latin typeface="Times New Roman" panose="02020603050405020304" pitchFamily="18" charset="0"/>
                           <a:ea typeface="Times New Roman" panose="02020603050405020304" pitchFamily="18" charset="0"/>
@@ -10123,7 +10218,7 @@
                         <a:buNone/>
                       </a:pPr>
                       <a:r>
-                        <a:rPr lang="es-ES_tradnl" sz="1100" dirty="0">
+                        <a:rPr lang="es-ES_tradnl" sz="900" dirty="0">
                           <a:effectLst/>
                           <a:latin typeface="Times New Roman" panose="02020603050405020304" pitchFamily="18" charset="0"/>
                           <a:ea typeface="Times New Roman" panose="02020603050405020304" pitchFamily="18" charset="0"/>
@@ -10155,7 +10250,7 @@
                         <a:buNone/>
                       </a:pPr>
                       <a:r>
-                        <a:rPr lang="es-ES_tradnl" sz="1100" dirty="0">
+                        <a:rPr lang="es-ES_tradnl" sz="900" dirty="0">
                           <a:effectLst/>
                           <a:latin typeface="Times New Roman" panose="02020603050405020304" pitchFamily="18" charset="0"/>
                           <a:ea typeface="Times New Roman" panose="02020603050405020304" pitchFamily="18" charset="0"/>
@@ -10187,7 +10282,7 @@
                         <a:buNone/>
                       </a:pPr>
                       <a:r>
-                        <a:rPr lang="es-ES_tradnl" sz="1100" dirty="0">
+                        <a:rPr lang="es-ES_tradnl" sz="900" dirty="0">
                           <a:effectLst/>
                           <a:latin typeface="Times New Roman" panose="02020603050405020304" pitchFamily="18" charset="0"/>
                           <a:ea typeface="Times New Roman" panose="02020603050405020304" pitchFamily="18" charset="0"/>
@@ -10219,7 +10314,7 @@
                         <a:buNone/>
                       </a:pPr>
                       <a:r>
-                        <a:rPr lang="es-ES_tradnl" sz="1100" dirty="0">
+                        <a:rPr lang="es-ES_tradnl" sz="900" dirty="0">
                           <a:effectLst/>
                           <a:latin typeface="Times New Roman" panose="02020603050405020304" pitchFamily="18" charset="0"/>
                           <a:ea typeface="Times New Roman" panose="02020603050405020304" pitchFamily="18" charset="0"/>
@@ -10251,14 +10346,20 @@
                         <a:buNone/>
                       </a:pPr>
                       <a:r>
-                        <a:rPr lang="es-ES_tradnl" sz="1100" dirty="0">
+                        <a:rPr lang="es-ES" sz="900">
                           <a:effectLst/>
                           <a:latin typeface="Times New Roman" panose="02020603050405020304" pitchFamily="18" charset="0"/>
                           <a:ea typeface="Times New Roman" panose="02020603050405020304" pitchFamily="18" charset="0"/>
                           <a:cs typeface="Times New Roman" panose="02020603050405020304" pitchFamily="18" charset="0"/>
                         </a:rPr>
-                        <a:t>161.01</a:t>
-                      </a:r>
+                        <a:t>6.00</a:t>
+                      </a:r>
+                      <a:endParaRPr lang="de-DE" sz="900">
+                        <a:effectLst/>
+                        <a:latin typeface="Times New Roman" panose="02020603050405020304" pitchFamily="18" charset="0"/>
+                        <a:ea typeface="Times New Roman" panose="02020603050405020304" pitchFamily="18" charset="0"/>
+                        <a:cs typeface="Times New Roman" panose="02020603050405020304" pitchFamily="18" charset="0"/>
+                      </a:endParaRPr>
                     </a:p>
                   </a:txBody>
                   <a:tcPr marL="68580" marR="68580" marT="0" marB="0">
@@ -10283,14 +10384,20 @@
                         <a:buNone/>
                       </a:pPr>
                       <a:r>
-                        <a:rPr lang="es-ES_tradnl" sz="1100" dirty="0">
+                        <a:rPr lang="es-ES" sz="900">
                           <a:effectLst/>
                           <a:latin typeface="Times New Roman" panose="02020603050405020304" pitchFamily="18" charset="0"/>
                           <a:ea typeface="Times New Roman" panose="02020603050405020304" pitchFamily="18" charset="0"/>
                           <a:cs typeface="Times New Roman" panose="02020603050405020304" pitchFamily="18" charset="0"/>
                         </a:rPr>
-                        <a:t>25.03</a:t>
-                      </a:r>
+                        <a:t>2.43</a:t>
+                      </a:r>
+                      <a:endParaRPr lang="de-DE" sz="900">
+                        <a:effectLst/>
+                        <a:latin typeface="Times New Roman" panose="02020603050405020304" pitchFamily="18" charset="0"/>
+                        <a:ea typeface="Times New Roman" panose="02020603050405020304" pitchFamily="18" charset="0"/>
+                        <a:cs typeface="Times New Roman" panose="02020603050405020304" pitchFamily="18" charset="0"/>
+                      </a:endParaRPr>
                     </a:p>
                   </a:txBody>
                   <a:tcPr marL="68580" marR="68580" marT="0" marB="0">
@@ -10315,14 +10422,20 @@
                         <a:buNone/>
                       </a:pPr>
                       <a:r>
-                        <a:rPr lang="es-ES_tradnl" sz="1100" dirty="0">
+                        <a:rPr lang="es-ES" sz="900">
                           <a:effectLst/>
                           <a:latin typeface="Times New Roman" panose="02020603050405020304" pitchFamily="18" charset="0"/>
                           <a:ea typeface="Times New Roman" panose="02020603050405020304" pitchFamily="18" charset="0"/>
                           <a:cs typeface="Times New Roman" panose="02020603050405020304" pitchFamily="18" charset="0"/>
                         </a:rPr>
-                        <a:t>186.02</a:t>
-                      </a:r>
+                        <a:t>28.50</a:t>
+                      </a:r>
+                      <a:endParaRPr lang="de-DE" sz="900">
+                        <a:effectLst/>
+                        <a:latin typeface="Times New Roman" panose="02020603050405020304" pitchFamily="18" charset="0"/>
+                        <a:ea typeface="Times New Roman" panose="02020603050405020304" pitchFamily="18" charset="0"/>
+                        <a:cs typeface="Times New Roman" panose="02020603050405020304" pitchFamily="18" charset="0"/>
+                      </a:endParaRPr>
                     </a:p>
                   </a:txBody>
                   <a:tcPr marL="68580" marR="68580" marT="0" marB="0">
@@ -10347,14 +10460,20 @@
                         <a:buNone/>
                       </a:pPr>
                       <a:r>
-                        <a:rPr lang="es-ES_tradnl" sz="1100" dirty="0">
+                        <a:rPr lang="es-ES" sz="900">
                           <a:effectLst/>
                           <a:latin typeface="Times New Roman" panose="02020603050405020304" pitchFamily="18" charset="0"/>
                           <a:ea typeface="Times New Roman" panose="02020603050405020304" pitchFamily="18" charset="0"/>
                           <a:cs typeface="Times New Roman" panose="02020603050405020304" pitchFamily="18" charset="0"/>
                         </a:rPr>
-                        <a:t>16.83</a:t>
-                      </a:r>
+                        <a:t>12.50</a:t>
+                      </a:r>
+                      <a:endParaRPr lang="de-DE" sz="900">
+                        <a:effectLst/>
+                        <a:latin typeface="Times New Roman" panose="02020603050405020304" pitchFamily="18" charset="0"/>
+                        <a:ea typeface="Times New Roman" panose="02020603050405020304" pitchFamily="18" charset="0"/>
+                        <a:cs typeface="Times New Roman" panose="02020603050405020304" pitchFamily="18" charset="0"/>
+                      </a:endParaRPr>
                     </a:p>
                   </a:txBody>
                   <a:tcPr marL="68580" marR="68580" marT="0" marB="0">
@@ -10379,14 +10498,20 @@
                         <a:buNone/>
                       </a:pPr>
                       <a:r>
-                        <a:rPr lang="es-ES_tradnl" sz="1100" dirty="0">
+                        <a:rPr lang="es-ES" sz="900">
                           <a:effectLst/>
                           <a:latin typeface="Times New Roman" panose="02020603050405020304" pitchFamily="18" charset="0"/>
                           <a:ea typeface="Times New Roman" panose="02020603050405020304" pitchFamily="18" charset="0"/>
                           <a:cs typeface="Times New Roman" panose="02020603050405020304" pitchFamily="18" charset="0"/>
                         </a:rPr>
-                        <a:t>167.99</a:t>
-                      </a:r>
+                        <a:t>13.03</a:t>
+                      </a:r>
+                      <a:endParaRPr lang="de-DE" sz="900">
+                        <a:effectLst/>
+                        <a:latin typeface="Times New Roman" panose="02020603050405020304" pitchFamily="18" charset="0"/>
+                        <a:ea typeface="Times New Roman" panose="02020603050405020304" pitchFamily="18" charset="0"/>
+                        <a:cs typeface="Times New Roman" panose="02020603050405020304" pitchFamily="18" charset="0"/>
+                      </a:endParaRPr>
                     </a:p>
                   </a:txBody>
                   <a:tcPr marL="68580" marR="68580" marT="0" marB="0">
@@ -10408,7 +10533,7 @@
                   </a:ext>
                 </a:extLst>
               </a:tr>
-              <a:tr h="185420">
+              <a:tr h="133669">
                 <a:tc>
                   <a:txBody>
                     <a:bodyPr/>
@@ -10444,7 +10569,7 @@
                         <a:buNone/>
                       </a:pPr>
                       <a:r>
-                        <a:rPr lang="es-ES_tradnl" sz="1100" dirty="0">
+                        <a:rPr lang="es-ES_tradnl" sz="900" dirty="0">
                           <a:effectLst/>
                           <a:latin typeface="Times New Roman" panose="02020603050405020304" pitchFamily="18" charset="0"/>
                           <a:ea typeface="Times New Roman" panose="02020603050405020304" pitchFamily="18" charset="0"/>
@@ -10467,7 +10592,7 @@
                         <a:buNone/>
                       </a:pPr>
                       <a:r>
-                        <a:rPr lang="es-ES_tradnl" sz="1100" dirty="0">
+                        <a:rPr lang="es-ES_tradnl" sz="900" dirty="0">
                           <a:effectLst/>
                           <a:latin typeface="Times New Roman" panose="02020603050405020304" pitchFamily="18" charset="0"/>
                           <a:ea typeface="Times New Roman" panose="02020603050405020304" pitchFamily="18" charset="0"/>
@@ -10490,7 +10615,7 @@
                         <a:buNone/>
                       </a:pPr>
                       <a:r>
-                        <a:rPr lang="es-ES_tradnl" sz="1100" dirty="0">
+                        <a:rPr lang="es-ES_tradnl" sz="900" dirty="0">
                           <a:effectLst/>
                           <a:latin typeface="Times New Roman" panose="02020603050405020304" pitchFamily="18" charset="0"/>
                           <a:ea typeface="Times New Roman" panose="02020603050405020304" pitchFamily="18" charset="0"/>
@@ -10513,7 +10638,7 @@
                         <a:buNone/>
                       </a:pPr>
                       <a:r>
-                        <a:rPr lang="es-ES_tradnl" sz="1100" dirty="0">
+                        <a:rPr lang="es-ES_tradnl" sz="900" dirty="0">
                           <a:effectLst/>
                           <a:latin typeface="Times New Roman" panose="02020603050405020304" pitchFamily="18" charset="0"/>
                           <a:ea typeface="Times New Roman" panose="02020603050405020304" pitchFamily="18" charset="0"/>
@@ -10536,7 +10661,7 @@
                         <a:buNone/>
                       </a:pPr>
                       <a:r>
-                        <a:rPr lang="es-ES_tradnl" sz="1100" dirty="0">
+                        <a:rPr lang="es-ES_tradnl" sz="900" dirty="0">
                           <a:effectLst/>
                           <a:latin typeface="Times New Roman" panose="02020603050405020304" pitchFamily="18" charset="0"/>
                           <a:ea typeface="Times New Roman" panose="02020603050405020304" pitchFamily="18" charset="0"/>
@@ -10559,7 +10684,7 @@
                         <a:buNone/>
                       </a:pPr>
                       <a:r>
-                        <a:rPr lang="es-ES_tradnl" sz="1100" dirty="0">
+                        <a:rPr lang="es-ES_tradnl" sz="900" dirty="0">
                           <a:effectLst/>
                           <a:latin typeface="Times New Roman" panose="02020603050405020304" pitchFamily="18" charset="0"/>
                           <a:ea typeface="Times New Roman" panose="02020603050405020304" pitchFamily="18" charset="0"/>
@@ -10582,7 +10707,7 @@
                         <a:buNone/>
                       </a:pPr>
                       <a:r>
-                        <a:rPr lang="es-ES_tradnl" sz="1100" dirty="0">
+                        <a:rPr lang="es-ES_tradnl" sz="900" dirty="0">
                           <a:effectLst/>
                           <a:latin typeface="Times New Roman" panose="02020603050405020304" pitchFamily="18" charset="0"/>
                           <a:ea typeface="Times New Roman" panose="02020603050405020304" pitchFamily="18" charset="0"/>
@@ -10605,7 +10730,7 @@
                         <a:buNone/>
                       </a:pPr>
                       <a:r>
-                        <a:rPr lang="es-ES_tradnl" sz="1100" dirty="0">
+                        <a:rPr lang="es-ES_tradnl" sz="900" dirty="0">
                           <a:effectLst/>
                           <a:latin typeface="Times New Roman" panose="02020603050405020304" pitchFamily="18" charset="0"/>
                           <a:ea typeface="Times New Roman" panose="02020603050405020304" pitchFamily="18" charset="0"/>
@@ -10628,7 +10753,7 @@
                         <a:buNone/>
                       </a:pPr>
                       <a:r>
-                        <a:rPr lang="es-ES_tradnl" sz="1100" dirty="0">
+                        <a:rPr lang="es-ES_tradnl" sz="900" dirty="0">
                           <a:effectLst/>
                           <a:latin typeface="Times New Roman" panose="02020603050405020304" pitchFamily="18" charset="0"/>
                           <a:ea typeface="Times New Roman" panose="02020603050405020304" pitchFamily="18" charset="0"/>
@@ -10651,7 +10776,7 @@
                         <a:buNone/>
                       </a:pPr>
                       <a:r>
-                        <a:rPr lang="es-ES_tradnl" sz="1100" dirty="0">
+                        <a:rPr lang="es-ES_tradnl" sz="900" dirty="0">
                           <a:effectLst/>
                           <a:latin typeface="Times New Roman" panose="02020603050405020304" pitchFamily="18" charset="0"/>
                           <a:ea typeface="Times New Roman" panose="02020603050405020304" pitchFamily="18" charset="0"/>
@@ -10674,106 +10799,136 @@
                         <a:buNone/>
                       </a:pPr>
                       <a:r>
-                        <a:rPr lang="es-ES_tradnl" sz="1100" dirty="0">
+                        <a:rPr lang="es-ES" sz="900">
                           <a:effectLst/>
                           <a:latin typeface="Times New Roman" panose="02020603050405020304" pitchFamily="18" charset="0"/>
                           <a:ea typeface="Times New Roman" panose="02020603050405020304" pitchFamily="18" charset="0"/>
                           <a:cs typeface="Times New Roman" panose="02020603050405020304" pitchFamily="18" charset="0"/>
                         </a:rPr>
-                        <a:t>161.01</a:t>
-                      </a:r>
-                    </a:p>
-                  </a:txBody>
-                  <a:tcPr marL="68580" marR="68580" marT="0" marB="0">
-                    <a:noFill/>
-                  </a:tcPr>
-                </a:tc>
-                <a:tc>
-                  <a:txBody>
-                    <a:bodyPr/>
-                    <a:lstStyle/>
-                    <a:p>
-                      <a:pPr algn="ctr">
-                        <a:buNone/>
-                      </a:pPr>
-                      <a:r>
-                        <a:rPr lang="es-ES_tradnl" sz="1100" dirty="0">
+                        <a:t>6.00</a:t>
+                      </a:r>
+                      <a:endParaRPr lang="de-DE" sz="900">
+                        <a:effectLst/>
+                        <a:latin typeface="Times New Roman" panose="02020603050405020304" pitchFamily="18" charset="0"/>
+                        <a:ea typeface="Times New Roman" panose="02020603050405020304" pitchFamily="18" charset="0"/>
+                        <a:cs typeface="Times New Roman" panose="02020603050405020304" pitchFamily="18" charset="0"/>
+                      </a:endParaRPr>
+                    </a:p>
+                  </a:txBody>
+                  <a:tcPr marL="68580" marR="68580" marT="0" marB="0">
+                    <a:noFill/>
+                  </a:tcPr>
+                </a:tc>
+                <a:tc>
+                  <a:txBody>
+                    <a:bodyPr/>
+                    <a:lstStyle/>
+                    <a:p>
+                      <a:pPr algn="ctr">
+                        <a:buNone/>
+                      </a:pPr>
+                      <a:r>
+                        <a:rPr lang="es-ES" sz="900">
                           <a:effectLst/>
                           <a:latin typeface="Times New Roman" panose="02020603050405020304" pitchFamily="18" charset="0"/>
                           <a:ea typeface="Times New Roman" panose="02020603050405020304" pitchFamily="18" charset="0"/>
                           <a:cs typeface="Times New Roman" panose="02020603050405020304" pitchFamily="18" charset="0"/>
                         </a:rPr>
-                        <a:t>26.14</a:t>
-                      </a:r>
-                    </a:p>
-                  </a:txBody>
-                  <a:tcPr marL="68580" marR="68580" marT="0" marB="0">
-                    <a:noFill/>
-                  </a:tcPr>
-                </a:tc>
-                <a:tc>
-                  <a:txBody>
-                    <a:bodyPr/>
-                    <a:lstStyle/>
-                    <a:p>
-                      <a:pPr algn="ctr">
-                        <a:buNone/>
-                      </a:pPr>
-                      <a:r>
-                        <a:rPr lang="es-ES_tradnl" sz="1100" dirty="0">
+                        <a:t>2.48</a:t>
+                      </a:r>
+                      <a:endParaRPr lang="de-DE" sz="900">
+                        <a:effectLst/>
+                        <a:latin typeface="Times New Roman" panose="02020603050405020304" pitchFamily="18" charset="0"/>
+                        <a:ea typeface="Times New Roman" panose="02020603050405020304" pitchFamily="18" charset="0"/>
+                        <a:cs typeface="Times New Roman" panose="02020603050405020304" pitchFamily="18" charset="0"/>
+                      </a:endParaRPr>
+                    </a:p>
+                  </a:txBody>
+                  <a:tcPr marL="68580" marR="68580" marT="0" marB="0">
+                    <a:noFill/>
+                  </a:tcPr>
+                </a:tc>
+                <a:tc>
+                  <a:txBody>
+                    <a:bodyPr/>
+                    <a:lstStyle/>
+                    <a:p>
+                      <a:pPr algn="ctr">
+                        <a:buNone/>
+                      </a:pPr>
+                      <a:r>
+                        <a:rPr lang="es-ES" sz="900">
                           <a:effectLst/>
                           <a:latin typeface="Times New Roman" panose="02020603050405020304" pitchFamily="18" charset="0"/>
                           <a:ea typeface="Times New Roman" panose="02020603050405020304" pitchFamily="18" charset="0"/>
                           <a:cs typeface="Times New Roman" panose="02020603050405020304" pitchFamily="18" charset="0"/>
                         </a:rPr>
-                        <a:t>186.26</a:t>
-                      </a:r>
-                    </a:p>
-                  </a:txBody>
-                  <a:tcPr marL="68580" marR="68580" marT="0" marB="0">
-                    <a:noFill/>
-                  </a:tcPr>
-                </a:tc>
-                <a:tc>
-                  <a:txBody>
-                    <a:bodyPr/>
-                    <a:lstStyle/>
-                    <a:p>
-                      <a:pPr algn="ctr">
-                        <a:buNone/>
-                      </a:pPr>
-                      <a:r>
-                        <a:rPr lang="es-ES_tradnl" sz="1100" dirty="0">
+                        <a:t>28.91</a:t>
+                      </a:r>
+                      <a:endParaRPr lang="de-DE" sz="900">
+                        <a:effectLst/>
+                        <a:latin typeface="Times New Roman" panose="02020603050405020304" pitchFamily="18" charset="0"/>
+                        <a:ea typeface="Times New Roman" panose="02020603050405020304" pitchFamily="18" charset="0"/>
+                        <a:cs typeface="Times New Roman" panose="02020603050405020304" pitchFamily="18" charset="0"/>
+                      </a:endParaRPr>
+                    </a:p>
+                  </a:txBody>
+                  <a:tcPr marL="68580" marR="68580" marT="0" marB="0">
+                    <a:noFill/>
+                  </a:tcPr>
+                </a:tc>
+                <a:tc>
+                  <a:txBody>
+                    <a:bodyPr/>
+                    <a:lstStyle/>
+                    <a:p>
+                      <a:pPr algn="ctr">
+                        <a:buNone/>
+                      </a:pPr>
+                      <a:r>
+                        <a:rPr lang="es-ES" sz="900">
                           <a:effectLst/>
                           <a:latin typeface="Times New Roman" panose="02020603050405020304" pitchFamily="18" charset="0"/>
                           <a:ea typeface="Times New Roman" panose="02020603050405020304" pitchFamily="18" charset="0"/>
                           <a:cs typeface="Times New Roman" panose="02020603050405020304" pitchFamily="18" charset="0"/>
                         </a:rPr>
-                        <a:t>16.93</a:t>
-                      </a:r>
-                    </a:p>
-                  </a:txBody>
-                  <a:tcPr marL="68580" marR="68580" marT="0" marB="0">
-                    <a:noFill/>
-                  </a:tcPr>
-                </a:tc>
-                <a:tc>
-                  <a:txBody>
-                    <a:bodyPr/>
-                    <a:lstStyle/>
-                    <a:p>
-                      <a:pPr algn="ctr">
-                        <a:buNone/>
-                      </a:pPr>
-                      <a:r>
-                        <a:rPr lang="es-ES_tradnl" sz="1100" dirty="0">
+                        <a:t>12.61</a:t>
+                      </a:r>
+                      <a:endParaRPr lang="de-DE" sz="900">
+                        <a:effectLst/>
+                        <a:latin typeface="Times New Roman" panose="02020603050405020304" pitchFamily="18" charset="0"/>
+                        <a:ea typeface="Times New Roman" panose="02020603050405020304" pitchFamily="18" charset="0"/>
+                        <a:cs typeface="Times New Roman" panose="02020603050405020304" pitchFamily="18" charset="0"/>
+                      </a:endParaRPr>
+                    </a:p>
+                  </a:txBody>
+                  <a:tcPr marL="68580" marR="68580" marT="0" marB="0">
+                    <a:noFill/>
+                  </a:tcPr>
+                </a:tc>
+                <a:tc>
+                  <a:txBody>
+                    <a:bodyPr/>
+                    <a:lstStyle/>
+                    <a:p>
+                      <a:pPr algn="ctr">
+                        <a:buNone/>
+                      </a:pPr>
+                      <a:r>
+                        <a:rPr lang="es-ES" sz="900">
                           <a:effectLst/>
                           <a:latin typeface="Times New Roman" panose="02020603050405020304" pitchFamily="18" charset="0"/>
                           <a:ea typeface="Times New Roman" panose="02020603050405020304" pitchFamily="18" charset="0"/>
                           <a:cs typeface="Times New Roman" panose="02020603050405020304" pitchFamily="18" charset="0"/>
                         </a:rPr>
-                        <a:t>168.98</a:t>
-                      </a:r>
+                        <a:t>10.81</a:t>
+                      </a:r>
+                      <a:endParaRPr lang="de-DE" sz="900">
+                        <a:effectLst/>
+                        <a:latin typeface="Times New Roman" panose="02020603050405020304" pitchFamily="18" charset="0"/>
+                        <a:ea typeface="Times New Roman" panose="02020603050405020304" pitchFamily="18" charset="0"/>
+                        <a:cs typeface="Times New Roman" panose="02020603050405020304" pitchFamily="18" charset="0"/>
+                      </a:endParaRPr>
                     </a:p>
                   </a:txBody>
                   <a:tcPr marL="68580" marR="68580" marT="0" marB="0">
@@ -10786,7 +10941,7 @@
                   </a:ext>
                 </a:extLst>
               </a:tr>
-              <a:tr h="185420">
+              <a:tr h="133669">
                 <a:tc>
                   <a:txBody>
                     <a:bodyPr/>
@@ -10822,7 +10977,7 @@
                         <a:buNone/>
                       </a:pPr>
                       <a:r>
-                        <a:rPr lang="es-ES_tradnl" sz="1100" dirty="0">
+                        <a:rPr lang="es-ES_tradnl" sz="900" dirty="0">
                           <a:effectLst/>
                           <a:latin typeface="Times New Roman" panose="02020603050405020304" pitchFamily="18" charset="0"/>
                           <a:ea typeface="Times New Roman" panose="02020603050405020304" pitchFamily="18" charset="0"/>
@@ -10845,7 +11000,7 @@
                         <a:buNone/>
                       </a:pPr>
                       <a:r>
-                        <a:rPr lang="es-ES_tradnl" sz="1100" dirty="0">
+                        <a:rPr lang="es-ES_tradnl" sz="900" dirty="0">
                           <a:effectLst/>
                           <a:latin typeface="Times New Roman" panose="02020603050405020304" pitchFamily="18" charset="0"/>
                           <a:ea typeface="Times New Roman" panose="02020603050405020304" pitchFamily="18" charset="0"/>
@@ -10868,7 +11023,7 @@
                         <a:buNone/>
                       </a:pPr>
                       <a:r>
-                        <a:rPr lang="es-ES_tradnl" sz="1100" dirty="0">
+                        <a:rPr lang="es-ES_tradnl" sz="900" dirty="0">
                           <a:effectLst/>
                           <a:latin typeface="Times New Roman" panose="02020603050405020304" pitchFamily="18" charset="0"/>
                           <a:ea typeface="Times New Roman" panose="02020603050405020304" pitchFamily="18" charset="0"/>
@@ -10891,7 +11046,7 @@
                         <a:buNone/>
                       </a:pPr>
                       <a:r>
-                        <a:rPr lang="es-ES_tradnl" sz="1100" dirty="0">
+                        <a:rPr lang="es-ES_tradnl" sz="900" dirty="0">
                           <a:effectLst/>
                           <a:latin typeface="Times New Roman" panose="02020603050405020304" pitchFamily="18" charset="0"/>
                           <a:ea typeface="Times New Roman" panose="02020603050405020304" pitchFamily="18" charset="0"/>
@@ -10914,7 +11069,7 @@
                         <a:buNone/>
                       </a:pPr>
                       <a:r>
-                        <a:rPr lang="es-ES_tradnl" sz="1100" dirty="0">
+                        <a:rPr lang="es-ES_tradnl" sz="900" dirty="0">
                           <a:effectLst/>
                           <a:latin typeface="Times New Roman" panose="02020603050405020304" pitchFamily="18" charset="0"/>
                           <a:ea typeface="Times New Roman" panose="02020603050405020304" pitchFamily="18" charset="0"/>
@@ -10937,7 +11092,7 @@
                         <a:buNone/>
                       </a:pPr>
                       <a:r>
-                        <a:rPr lang="es-ES_tradnl" sz="1100" dirty="0">
+                        <a:rPr lang="es-ES_tradnl" sz="900" dirty="0">
                           <a:effectLst/>
                           <a:latin typeface="Times New Roman" panose="02020603050405020304" pitchFamily="18" charset="0"/>
                           <a:ea typeface="Times New Roman" panose="02020603050405020304" pitchFamily="18" charset="0"/>
@@ -10960,7 +11115,7 @@
                         <a:buNone/>
                       </a:pPr>
                       <a:r>
-                        <a:rPr lang="es-ES_tradnl" sz="1100" dirty="0">
+                        <a:rPr lang="es-ES_tradnl" sz="900" dirty="0">
                           <a:effectLst/>
                           <a:latin typeface="Times New Roman" panose="02020603050405020304" pitchFamily="18" charset="0"/>
                           <a:ea typeface="Times New Roman" panose="02020603050405020304" pitchFamily="18" charset="0"/>
@@ -10983,7 +11138,7 @@
                         <a:buNone/>
                       </a:pPr>
                       <a:r>
-                        <a:rPr lang="es-ES_tradnl" sz="1100" dirty="0">
+                        <a:rPr lang="es-ES_tradnl" sz="900" dirty="0">
                           <a:effectLst/>
                           <a:latin typeface="Times New Roman" panose="02020603050405020304" pitchFamily="18" charset="0"/>
                           <a:ea typeface="Times New Roman" panose="02020603050405020304" pitchFamily="18" charset="0"/>
@@ -11006,7 +11161,7 @@
                         <a:buNone/>
                       </a:pPr>
                       <a:r>
-                        <a:rPr lang="es-ES_tradnl" sz="1100" dirty="0">
+                        <a:rPr lang="es-ES_tradnl" sz="900" dirty="0">
                           <a:effectLst/>
                           <a:latin typeface="Times New Roman" panose="02020603050405020304" pitchFamily="18" charset="0"/>
                           <a:ea typeface="Times New Roman" panose="02020603050405020304" pitchFamily="18" charset="0"/>
@@ -11029,7 +11184,7 @@
                         <a:buNone/>
                       </a:pPr>
                       <a:r>
-                        <a:rPr lang="es-ES_tradnl" sz="1100" dirty="0">
+                        <a:rPr lang="es-ES_tradnl" sz="900" dirty="0">
                           <a:effectLst/>
                           <a:latin typeface="Times New Roman" panose="02020603050405020304" pitchFamily="18" charset="0"/>
                           <a:ea typeface="Times New Roman" panose="02020603050405020304" pitchFamily="18" charset="0"/>
@@ -11052,106 +11207,136 @@
                         <a:buNone/>
                       </a:pPr>
                       <a:r>
-                        <a:rPr lang="es-ES_tradnl" sz="1100" dirty="0">
+                        <a:rPr lang="es-ES" sz="900">
                           <a:effectLst/>
                           <a:latin typeface="Times New Roman" panose="02020603050405020304" pitchFamily="18" charset="0"/>
                           <a:ea typeface="Times New Roman" panose="02020603050405020304" pitchFamily="18" charset="0"/>
                           <a:cs typeface="Times New Roman" panose="02020603050405020304" pitchFamily="18" charset="0"/>
                         </a:rPr>
-                        <a:t>161.01</a:t>
-                      </a:r>
-                    </a:p>
-                  </a:txBody>
-                  <a:tcPr marL="68580" marR="68580" marT="0" marB="0">
-                    <a:noFill/>
-                  </a:tcPr>
-                </a:tc>
-                <a:tc>
-                  <a:txBody>
-                    <a:bodyPr/>
-                    <a:lstStyle/>
-                    <a:p>
-                      <a:pPr algn="ctr">
-                        <a:buNone/>
-                      </a:pPr>
-                      <a:r>
-                        <a:rPr lang="es-ES_tradnl" sz="1100" dirty="0">
+                        <a:t>6.00</a:t>
+                      </a:r>
+                      <a:endParaRPr lang="de-DE" sz="900">
+                        <a:effectLst/>
+                        <a:latin typeface="Times New Roman" panose="02020603050405020304" pitchFamily="18" charset="0"/>
+                        <a:ea typeface="Times New Roman" panose="02020603050405020304" pitchFamily="18" charset="0"/>
+                        <a:cs typeface="Times New Roman" panose="02020603050405020304" pitchFamily="18" charset="0"/>
+                      </a:endParaRPr>
+                    </a:p>
+                  </a:txBody>
+                  <a:tcPr marL="68580" marR="68580" marT="0" marB="0">
+                    <a:noFill/>
+                  </a:tcPr>
+                </a:tc>
+                <a:tc>
+                  <a:txBody>
+                    <a:bodyPr/>
+                    <a:lstStyle/>
+                    <a:p>
+                      <a:pPr algn="ctr">
+                        <a:buNone/>
+                      </a:pPr>
+                      <a:r>
+                        <a:rPr lang="es-ES" sz="900">
                           <a:effectLst/>
                           <a:latin typeface="Times New Roman" panose="02020603050405020304" pitchFamily="18" charset="0"/>
                           <a:ea typeface="Times New Roman" panose="02020603050405020304" pitchFamily="18" charset="0"/>
                           <a:cs typeface="Times New Roman" panose="02020603050405020304" pitchFamily="18" charset="0"/>
                         </a:rPr>
-                        <a:t>26.48</a:t>
-                      </a:r>
-                    </a:p>
-                  </a:txBody>
-                  <a:tcPr marL="68580" marR="68580" marT="0" marB="0">
-                    <a:noFill/>
-                  </a:tcPr>
-                </a:tc>
-                <a:tc>
-                  <a:txBody>
-                    <a:bodyPr/>
-                    <a:lstStyle/>
-                    <a:p>
-                      <a:pPr algn="ctr">
-                        <a:buNone/>
-                      </a:pPr>
-                      <a:r>
-                        <a:rPr lang="es-ES_tradnl" sz="1100" dirty="0">
+                        <a:t>2.51</a:t>
+                      </a:r>
+                      <a:endParaRPr lang="de-DE" sz="900">
+                        <a:effectLst/>
+                        <a:latin typeface="Times New Roman" panose="02020603050405020304" pitchFamily="18" charset="0"/>
+                        <a:ea typeface="Times New Roman" panose="02020603050405020304" pitchFamily="18" charset="0"/>
+                        <a:cs typeface="Times New Roman" panose="02020603050405020304" pitchFamily="18" charset="0"/>
+                      </a:endParaRPr>
+                    </a:p>
+                  </a:txBody>
+                  <a:tcPr marL="68580" marR="68580" marT="0" marB="0">
+                    <a:noFill/>
+                  </a:tcPr>
+                </a:tc>
+                <a:tc>
+                  <a:txBody>
+                    <a:bodyPr/>
+                    <a:lstStyle/>
+                    <a:p>
+                      <a:pPr algn="ctr">
+                        <a:buNone/>
+                      </a:pPr>
+                      <a:r>
+                        <a:rPr lang="es-ES" sz="900">
                           <a:effectLst/>
                           <a:latin typeface="Times New Roman" panose="02020603050405020304" pitchFamily="18" charset="0"/>
                           <a:ea typeface="Times New Roman" panose="02020603050405020304" pitchFamily="18" charset="0"/>
                           <a:cs typeface="Times New Roman" panose="02020603050405020304" pitchFamily="18" charset="0"/>
                         </a:rPr>
-                        <a:t>187.95</a:t>
-                      </a:r>
-                    </a:p>
-                  </a:txBody>
-                  <a:tcPr marL="68580" marR="68580" marT="0" marB="0">
-                    <a:noFill/>
-                  </a:tcPr>
-                </a:tc>
-                <a:tc>
-                  <a:txBody>
-                    <a:bodyPr/>
-                    <a:lstStyle/>
-                    <a:p>
-                      <a:pPr algn="ctr">
-                        <a:buNone/>
-                      </a:pPr>
-                      <a:r>
-                        <a:rPr lang="es-ES_tradnl" sz="1100" dirty="0">
+                        <a:t>29.62</a:t>
+                      </a:r>
+                      <a:endParaRPr lang="de-DE" sz="900">
+                        <a:effectLst/>
+                        <a:latin typeface="Times New Roman" panose="02020603050405020304" pitchFamily="18" charset="0"/>
+                        <a:ea typeface="Times New Roman" panose="02020603050405020304" pitchFamily="18" charset="0"/>
+                        <a:cs typeface="Times New Roman" panose="02020603050405020304" pitchFamily="18" charset="0"/>
+                      </a:endParaRPr>
+                    </a:p>
+                  </a:txBody>
+                  <a:tcPr marL="68580" marR="68580" marT="0" marB="0">
+                    <a:noFill/>
+                  </a:tcPr>
+                </a:tc>
+                <a:tc>
+                  <a:txBody>
+                    <a:bodyPr/>
+                    <a:lstStyle/>
+                    <a:p>
+                      <a:pPr algn="ctr">
+                        <a:buNone/>
+                      </a:pPr>
+                      <a:r>
+                        <a:rPr lang="es-ES" sz="900">
                           <a:effectLst/>
                           <a:latin typeface="Times New Roman" panose="02020603050405020304" pitchFamily="18" charset="0"/>
                           <a:ea typeface="Times New Roman" panose="02020603050405020304" pitchFamily="18" charset="0"/>
                           <a:cs typeface="Times New Roman" panose="02020603050405020304" pitchFamily="18" charset="0"/>
                         </a:rPr>
-                        <a:t>17.17</a:t>
-                      </a:r>
-                    </a:p>
-                  </a:txBody>
-                  <a:tcPr marL="68580" marR="68580" marT="0" marB="0">
-                    <a:noFill/>
-                  </a:tcPr>
-                </a:tc>
-                <a:tc>
-                  <a:txBody>
-                    <a:bodyPr/>
-                    <a:lstStyle/>
-                    <a:p>
-                      <a:pPr algn="ctr">
-                        <a:buNone/>
-                      </a:pPr>
-                      <a:r>
-                        <a:rPr lang="es-ES_tradnl" sz="1100" dirty="0">
+                        <a:t>12.77</a:t>
+                      </a:r>
+                      <a:endParaRPr lang="de-DE" sz="900">
+                        <a:effectLst/>
+                        <a:latin typeface="Times New Roman" panose="02020603050405020304" pitchFamily="18" charset="0"/>
+                        <a:ea typeface="Times New Roman" panose="02020603050405020304" pitchFamily="18" charset="0"/>
+                        <a:cs typeface="Times New Roman" panose="02020603050405020304" pitchFamily="18" charset="0"/>
+                      </a:endParaRPr>
+                    </a:p>
+                  </a:txBody>
+                  <a:tcPr marL="68580" marR="68580" marT="0" marB="0">
+                    <a:noFill/>
+                  </a:tcPr>
+                </a:tc>
+                <a:tc>
+                  <a:txBody>
+                    <a:bodyPr/>
+                    <a:lstStyle/>
+                    <a:p>
+                      <a:pPr algn="ctr">
+                        <a:buNone/>
+                      </a:pPr>
+                      <a:r>
+                        <a:rPr lang="es-ES" sz="900" dirty="0">
                           <a:effectLst/>
                           <a:latin typeface="Times New Roman" panose="02020603050405020304" pitchFamily="18" charset="0"/>
                           <a:ea typeface="Times New Roman" panose="02020603050405020304" pitchFamily="18" charset="0"/>
                           <a:cs typeface="Times New Roman" panose="02020603050405020304" pitchFamily="18" charset="0"/>
                         </a:rPr>
-                        <a:t>167.98</a:t>
-                      </a:r>
+                        <a:t>12.22</a:t>
+                      </a:r>
+                      <a:endParaRPr lang="de-DE" sz="900" dirty="0">
+                        <a:effectLst/>
+                        <a:latin typeface="Times New Roman" panose="02020603050405020304" pitchFamily="18" charset="0"/>
+                        <a:ea typeface="Times New Roman" panose="02020603050405020304" pitchFamily="18" charset="0"/>
+                        <a:cs typeface="Times New Roman" panose="02020603050405020304" pitchFamily="18" charset="0"/>
+                      </a:endParaRPr>
                     </a:p>
                   </a:txBody>
                   <a:tcPr marL="68580" marR="68580" marT="0" marB="0">
@@ -11164,7 +11349,7 @@
                   </a:ext>
                 </a:extLst>
               </a:tr>
-              <a:tr h="185420">
+              <a:tr h="133669">
                 <a:tc>
                   <a:txBody>
                     <a:bodyPr/>
@@ -11494,7 +11679,7 @@
                   </a:ext>
                 </a:extLst>
               </a:tr>
-              <a:tr h="185420">
+              <a:tr h="133669">
                 <a:tc>
                   <a:txBody>
                     <a:bodyPr/>
@@ -12410,38 +12595,6 @@
           </a:p>
         </p:txBody>
       </p:sp>
-      <p:pic>
-        <p:nvPicPr>
-          <p:cNvPr id="8" name="Onlinebild-Platzhalter 7">
-            <a:extLst>
-              <a:ext uri="{FF2B5EF4-FFF2-40B4-BE49-F238E27FC236}">
-                <a16:creationId xmlns:a16="http://schemas.microsoft.com/office/drawing/2014/main" id="{F115421E-D74F-4BF4-8101-BECDF76DAD2E}"/>
-              </a:ext>
-            </a:extLst>
-          </p:cNvPr>
-          <p:cNvPicPr>
-            <a:picLocks noGrp="1" noChangeAspect="1"/>
-          </p:cNvPicPr>
-          <p:nvPr>
-            <p:ph type="clipArt" sz="quarter" idx="15"/>
-          </p:nvPr>
-        </p:nvPicPr>
-        <p:blipFill>
-          <a:blip r:embed="rId2"/>
-          <a:stretch>
-            <a:fillRect/>
-          </a:stretch>
-        </p:blipFill>
-        <p:spPr>
-          <a:xfrm>
-            <a:off x="583920" y="2151063"/>
-            <a:ext cx="5239310" cy="4008437"/>
-          </a:xfrm>
-          <a:prstGeom prst="rect">
-            <a:avLst/>
-          </a:prstGeom>
-        </p:spPr>
-      </p:pic>
       <p:sp>
         <p:nvSpPr>
           <p:cNvPr id="4" name="Fußzeilenplatzhalter 2">
@@ -12571,6 +12724,38 @@
           </a:p>
         </p:txBody>
       </p:sp>
+      <p:pic>
+        <p:nvPicPr>
+          <p:cNvPr id="12" name="Onlinebild-Platzhalter 11">
+            <a:extLst>
+              <a:ext uri="{FF2B5EF4-FFF2-40B4-BE49-F238E27FC236}">
+                <a16:creationId xmlns:a16="http://schemas.microsoft.com/office/drawing/2014/main" id="{A875EEDA-C6A7-AC00-1E9B-CADF00A1CECC}"/>
+              </a:ext>
+            </a:extLst>
+          </p:cNvPr>
+          <p:cNvPicPr>
+            <a:picLocks noGrp="1" noChangeAspect="1"/>
+          </p:cNvPicPr>
+          <p:nvPr>
+            <p:ph type="clipArt" sz="quarter" idx="15"/>
+          </p:nvPr>
+        </p:nvPicPr>
+        <p:blipFill>
+          <a:blip r:embed="rId2"/>
+          <a:stretch>
+            <a:fillRect/>
+          </a:stretch>
+        </p:blipFill>
+        <p:spPr>
+          <a:xfrm>
+            <a:off x="583920" y="2151063"/>
+            <a:ext cx="5239310" cy="4008437"/>
+          </a:xfrm>
+          <a:prstGeom prst="rect">
+            <a:avLst/>
+          </a:prstGeom>
+        </p:spPr>
+      </p:pic>
     </p:spTree>
     <p:extLst>
       <p:ext uri="{BB962C8B-B14F-4D97-AF65-F5344CB8AC3E}">
@@ -12668,7 +12853,7 @@
             <p:ph sz="quarter" idx="14"/>
             <p:extLst>
               <p:ext uri="{D42A27DB-BD31-4B8C-83A1-F6EECF244321}">
-                <p14:modId xmlns:p14="http://schemas.microsoft.com/office/powerpoint/2010/main" val="39684778"/>
+                <p14:modId xmlns:p14="http://schemas.microsoft.com/office/powerpoint/2010/main" val="3067020210"/>
               </p:ext>
             </p:extLst>
           </p:nvPr>
@@ -13698,7 +13883,7 @@
                         <a:buNone/>
                       </a:pPr>
                       <a:r>
-                        <a:rPr lang="es-ES_tradnl" sz="1100" dirty="0">
+                        <a:rPr lang="es-ES_tradnl" sz="900" dirty="0">
                           <a:effectLst/>
                           <a:latin typeface="Times New Roman" panose="02020603050405020304" pitchFamily="18" charset="0"/>
                           <a:ea typeface="Times New Roman" panose="02020603050405020304" pitchFamily="18" charset="0"/>
@@ -13730,7 +13915,7 @@
                         <a:buNone/>
                       </a:pPr>
                       <a:r>
-                        <a:rPr lang="es-ES_tradnl" sz="1100" dirty="0">
+                        <a:rPr lang="es-ES_tradnl" sz="900" dirty="0">
                           <a:effectLst/>
                           <a:latin typeface="Times New Roman" panose="02020603050405020304" pitchFamily="18" charset="0"/>
                           <a:ea typeface="Times New Roman" panose="02020603050405020304" pitchFamily="18" charset="0"/>
@@ -13762,7 +13947,7 @@
                         <a:buNone/>
                       </a:pPr>
                       <a:r>
-                        <a:rPr lang="es-ES_tradnl" sz="1100" dirty="0">
+                        <a:rPr lang="es-ES_tradnl" sz="900" dirty="0">
                           <a:effectLst/>
                           <a:latin typeface="Times New Roman" panose="02020603050405020304" pitchFamily="18" charset="0"/>
                           <a:ea typeface="Times New Roman" panose="02020603050405020304" pitchFamily="18" charset="0"/>
@@ -13794,7 +13979,7 @@
                         <a:buNone/>
                       </a:pPr>
                       <a:r>
-                        <a:rPr lang="es-ES_tradnl" sz="1100" dirty="0">
+                        <a:rPr lang="es-ES_tradnl" sz="900" dirty="0">
                           <a:effectLst/>
                           <a:latin typeface="Times New Roman" panose="02020603050405020304" pitchFamily="18" charset="0"/>
                           <a:ea typeface="Times New Roman" panose="02020603050405020304" pitchFamily="18" charset="0"/>
@@ -13826,7 +14011,7 @@
                         <a:buNone/>
                       </a:pPr>
                       <a:r>
-                        <a:rPr lang="es-ES_tradnl" sz="1100" dirty="0">
+                        <a:rPr lang="es-ES_tradnl" sz="900" dirty="0">
                           <a:effectLst/>
                           <a:latin typeface="Times New Roman" panose="02020603050405020304" pitchFamily="18" charset="0"/>
                           <a:ea typeface="Times New Roman" panose="02020603050405020304" pitchFamily="18" charset="0"/>
@@ -13858,7 +14043,7 @@
                         <a:buNone/>
                       </a:pPr>
                       <a:r>
-                        <a:rPr lang="es-ES_tradnl" sz="1100" dirty="0">
+                        <a:rPr lang="es-ES_tradnl" sz="900" dirty="0">
                           <a:effectLst/>
                           <a:latin typeface="Times New Roman" panose="02020603050405020304" pitchFamily="18" charset="0"/>
                           <a:ea typeface="Times New Roman" panose="02020603050405020304" pitchFamily="18" charset="0"/>
@@ -13890,7 +14075,7 @@
                         <a:buNone/>
                       </a:pPr>
                       <a:r>
-                        <a:rPr lang="es-ES_tradnl" sz="1100" dirty="0">
+                        <a:rPr lang="es-ES_tradnl" sz="900" dirty="0">
                           <a:effectLst/>
                           <a:latin typeface="Times New Roman" panose="02020603050405020304" pitchFamily="18" charset="0"/>
                           <a:ea typeface="Times New Roman" panose="02020603050405020304" pitchFamily="18" charset="0"/>
@@ -13922,7 +14107,7 @@
                         <a:buNone/>
                       </a:pPr>
                       <a:r>
-                        <a:rPr lang="es-ES_tradnl" sz="1100" dirty="0">
+                        <a:rPr lang="es-ES_tradnl" sz="900" dirty="0">
                           <a:effectLst/>
                           <a:latin typeface="Times New Roman" panose="02020603050405020304" pitchFamily="18" charset="0"/>
                           <a:ea typeface="Times New Roman" panose="02020603050405020304" pitchFamily="18" charset="0"/>
@@ -13954,7 +14139,7 @@
                         <a:buNone/>
                       </a:pPr>
                       <a:r>
-                        <a:rPr lang="es-ES_tradnl" sz="1100" dirty="0">
+                        <a:rPr lang="es-ES_tradnl" sz="900" dirty="0">
                           <a:effectLst/>
                           <a:latin typeface="Times New Roman" panose="02020603050405020304" pitchFamily="18" charset="0"/>
                           <a:ea typeface="Times New Roman" panose="02020603050405020304" pitchFamily="18" charset="0"/>
@@ -13986,7 +14171,7 @@
                         <a:buNone/>
                       </a:pPr>
                       <a:r>
-                        <a:rPr lang="es-ES_tradnl" sz="1100" dirty="0">
+                        <a:rPr lang="es-ES_tradnl" sz="900" dirty="0">
                           <a:effectLst/>
                           <a:latin typeface="Times New Roman" panose="02020603050405020304" pitchFamily="18" charset="0"/>
                           <a:ea typeface="Times New Roman" panose="02020603050405020304" pitchFamily="18" charset="0"/>
@@ -14018,14 +14203,20 @@
                         <a:buNone/>
                       </a:pPr>
                       <a:r>
-                        <a:rPr lang="es-ES_tradnl" sz="1100" dirty="0">
+                        <a:rPr lang="es-ES" sz="900">
                           <a:effectLst/>
                           <a:latin typeface="Times New Roman" panose="02020603050405020304" pitchFamily="18" charset="0"/>
                           <a:ea typeface="Times New Roman" panose="02020603050405020304" pitchFamily="18" charset="0"/>
                           <a:cs typeface="Times New Roman" panose="02020603050405020304" pitchFamily="18" charset="0"/>
                         </a:rPr>
-                        <a:t>161.01</a:t>
-                      </a:r>
+                        <a:t>6.00</a:t>
+                      </a:r>
+                      <a:endParaRPr lang="de-DE" sz="900">
+                        <a:effectLst/>
+                        <a:latin typeface="Times New Roman" panose="02020603050405020304" pitchFamily="18" charset="0"/>
+                        <a:ea typeface="Times New Roman" panose="02020603050405020304" pitchFamily="18" charset="0"/>
+                        <a:cs typeface="Times New Roman" panose="02020603050405020304" pitchFamily="18" charset="0"/>
+                      </a:endParaRPr>
                     </a:p>
                   </a:txBody>
                   <a:tcPr marL="68580" marR="68580" marT="0" marB="0">
@@ -14050,14 +14241,20 @@
                         <a:buNone/>
                       </a:pPr>
                       <a:r>
-                        <a:rPr lang="es-ES_tradnl" sz="1100" dirty="0">
+                        <a:rPr lang="es-ES" sz="900">
                           <a:effectLst/>
                           <a:latin typeface="Times New Roman" panose="02020603050405020304" pitchFamily="18" charset="0"/>
                           <a:ea typeface="Times New Roman" panose="02020603050405020304" pitchFamily="18" charset="0"/>
                           <a:cs typeface="Times New Roman" panose="02020603050405020304" pitchFamily="18" charset="0"/>
                         </a:rPr>
-                        <a:t>26.14</a:t>
-                      </a:r>
+                        <a:t>2.48</a:t>
+                      </a:r>
+                      <a:endParaRPr lang="de-DE" sz="900">
+                        <a:effectLst/>
+                        <a:latin typeface="Times New Roman" panose="02020603050405020304" pitchFamily="18" charset="0"/>
+                        <a:ea typeface="Times New Roman" panose="02020603050405020304" pitchFamily="18" charset="0"/>
+                        <a:cs typeface="Times New Roman" panose="02020603050405020304" pitchFamily="18" charset="0"/>
+                      </a:endParaRPr>
                     </a:p>
                   </a:txBody>
                   <a:tcPr marL="68580" marR="68580" marT="0" marB="0">
@@ -14082,14 +14279,20 @@
                         <a:buNone/>
                       </a:pPr>
                       <a:r>
-                        <a:rPr lang="es-ES_tradnl" sz="1100" dirty="0">
+                        <a:rPr lang="es-ES" sz="900">
                           <a:effectLst/>
                           <a:latin typeface="Times New Roman" panose="02020603050405020304" pitchFamily="18" charset="0"/>
                           <a:ea typeface="Times New Roman" panose="02020603050405020304" pitchFamily="18" charset="0"/>
                           <a:cs typeface="Times New Roman" panose="02020603050405020304" pitchFamily="18" charset="0"/>
                         </a:rPr>
-                        <a:t>186.26</a:t>
-                      </a:r>
+                        <a:t>28.91</a:t>
+                      </a:r>
+                      <a:endParaRPr lang="de-DE" sz="900">
+                        <a:effectLst/>
+                        <a:latin typeface="Times New Roman" panose="02020603050405020304" pitchFamily="18" charset="0"/>
+                        <a:ea typeface="Times New Roman" panose="02020603050405020304" pitchFamily="18" charset="0"/>
+                        <a:cs typeface="Times New Roman" panose="02020603050405020304" pitchFamily="18" charset="0"/>
+                      </a:endParaRPr>
                     </a:p>
                   </a:txBody>
                   <a:tcPr marL="68580" marR="68580" marT="0" marB="0">
@@ -14114,14 +14317,20 @@
                         <a:buNone/>
                       </a:pPr>
                       <a:r>
-                        <a:rPr lang="es-ES_tradnl" sz="1100" dirty="0">
+                        <a:rPr lang="es-ES" sz="900">
                           <a:effectLst/>
                           <a:latin typeface="Times New Roman" panose="02020603050405020304" pitchFamily="18" charset="0"/>
                           <a:ea typeface="Times New Roman" panose="02020603050405020304" pitchFamily="18" charset="0"/>
                           <a:cs typeface="Times New Roman" panose="02020603050405020304" pitchFamily="18" charset="0"/>
                         </a:rPr>
-                        <a:t>16.93</a:t>
-                      </a:r>
+                        <a:t>12.61</a:t>
+                      </a:r>
+                      <a:endParaRPr lang="de-DE" sz="900">
+                        <a:effectLst/>
+                        <a:latin typeface="Times New Roman" panose="02020603050405020304" pitchFamily="18" charset="0"/>
+                        <a:ea typeface="Times New Roman" panose="02020603050405020304" pitchFamily="18" charset="0"/>
+                        <a:cs typeface="Times New Roman" panose="02020603050405020304" pitchFamily="18" charset="0"/>
+                      </a:endParaRPr>
                     </a:p>
                   </a:txBody>
                   <a:tcPr marL="68580" marR="68580" marT="0" marB="0">
@@ -14146,14 +14355,20 @@
                         <a:buNone/>
                       </a:pPr>
                       <a:r>
-                        <a:rPr lang="es-ES_tradnl" sz="1100" dirty="0">
+                        <a:rPr lang="es-ES" sz="900">
                           <a:effectLst/>
                           <a:latin typeface="Times New Roman" panose="02020603050405020304" pitchFamily="18" charset="0"/>
                           <a:ea typeface="Times New Roman" panose="02020603050405020304" pitchFamily="18" charset="0"/>
                           <a:cs typeface="Times New Roman" panose="02020603050405020304" pitchFamily="18" charset="0"/>
                         </a:rPr>
-                        <a:t>168.98</a:t>
-                      </a:r>
+                        <a:t>10.81</a:t>
+                      </a:r>
+                      <a:endParaRPr lang="de-DE" sz="900">
+                        <a:effectLst/>
+                        <a:latin typeface="Times New Roman" panose="02020603050405020304" pitchFamily="18" charset="0"/>
+                        <a:ea typeface="Times New Roman" panose="02020603050405020304" pitchFamily="18" charset="0"/>
+                        <a:cs typeface="Times New Roman" panose="02020603050405020304" pitchFamily="18" charset="0"/>
+                      </a:endParaRPr>
                     </a:p>
                   </a:txBody>
                   <a:tcPr marL="68580" marR="68580" marT="0" marB="0">
@@ -14211,7 +14426,7 @@
                         <a:buNone/>
                       </a:pPr>
                       <a:r>
-                        <a:rPr lang="es-ES_tradnl" sz="1100" dirty="0">
+                        <a:rPr lang="es-ES_tradnl" sz="900" dirty="0">
                           <a:effectLst/>
                           <a:latin typeface="Times New Roman" panose="02020603050405020304" pitchFamily="18" charset="0"/>
                           <a:ea typeface="Times New Roman" panose="02020603050405020304" pitchFamily="18" charset="0"/>
@@ -14234,7 +14449,7 @@
                         <a:buNone/>
                       </a:pPr>
                       <a:r>
-                        <a:rPr lang="es-ES_tradnl" sz="1100" dirty="0">
+                        <a:rPr lang="es-ES_tradnl" sz="900" dirty="0">
                           <a:effectLst/>
                           <a:latin typeface="Times New Roman" panose="02020603050405020304" pitchFamily="18" charset="0"/>
                           <a:ea typeface="Times New Roman" panose="02020603050405020304" pitchFamily="18" charset="0"/>
@@ -14257,7 +14472,7 @@
                         <a:buNone/>
                       </a:pPr>
                       <a:r>
-                        <a:rPr lang="es-ES_tradnl" sz="1100" dirty="0">
+                        <a:rPr lang="es-ES_tradnl" sz="900" dirty="0">
                           <a:effectLst/>
                           <a:latin typeface="Times New Roman" panose="02020603050405020304" pitchFamily="18" charset="0"/>
                           <a:ea typeface="Times New Roman" panose="02020603050405020304" pitchFamily="18" charset="0"/>
@@ -14280,7 +14495,7 @@
                         <a:buNone/>
                       </a:pPr>
                       <a:r>
-                        <a:rPr lang="es-ES_tradnl" sz="1100" dirty="0">
+                        <a:rPr lang="es-ES_tradnl" sz="900" dirty="0">
                           <a:effectLst/>
                           <a:latin typeface="Times New Roman" panose="02020603050405020304" pitchFamily="18" charset="0"/>
                           <a:ea typeface="Times New Roman" panose="02020603050405020304" pitchFamily="18" charset="0"/>
@@ -14303,7 +14518,7 @@
                         <a:buNone/>
                       </a:pPr>
                       <a:r>
-                        <a:rPr lang="es-ES_tradnl" sz="1100" dirty="0">
+                        <a:rPr lang="es-ES_tradnl" sz="900" dirty="0">
                           <a:effectLst/>
                           <a:latin typeface="Times New Roman" panose="02020603050405020304" pitchFamily="18" charset="0"/>
                           <a:ea typeface="Times New Roman" panose="02020603050405020304" pitchFamily="18" charset="0"/>
@@ -14326,7 +14541,7 @@
                         <a:buNone/>
                       </a:pPr>
                       <a:r>
-                        <a:rPr lang="es-ES_tradnl" sz="1100" dirty="0">
+                        <a:rPr lang="es-ES_tradnl" sz="900" dirty="0">
                           <a:effectLst/>
                           <a:latin typeface="Times New Roman" panose="02020603050405020304" pitchFamily="18" charset="0"/>
                           <a:ea typeface="Times New Roman" panose="02020603050405020304" pitchFamily="18" charset="0"/>
@@ -14349,7 +14564,7 @@
                         <a:buNone/>
                       </a:pPr>
                       <a:r>
-                        <a:rPr lang="es-ES_tradnl" sz="1100" dirty="0">
+                        <a:rPr lang="es-ES_tradnl" sz="900" dirty="0">
                           <a:effectLst/>
                           <a:latin typeface="Times New Roman" panose="02020603050405020304" pitchFamily="18" charset="0"/>
                           <a:ea typeface="Times New Roman" panose="02020603050405020304" pitchFamily="18" charset="0"/>
@@ -14372,7 +14587,7 @@
                         <a:buNone/>
                       </a:pPr>
                       <a:r>
-                        <a:rPr lang="es-ES_tradnl" sz="1100" dirty="0">
+                        <a:rPr lang="es-ES_tradnl" sz="900" dirty="0">
                           <a:effectLst/>
                           <a:latin typeface="Times New Roman" panose="02020603050405020304" pitchFamily="18" charset="0"/>
                           <a:ea typeface="Times New Roman" panose="02020603050405020304" pitchFamily="18" charset="0"/>
@@ -14395,7 +14610,7 @@
                         <a:buNone/>
                       </a:pPr>
                       <a:r>
-                        <a:rPr lang="es-ES_tradnl" sz="1100" dirty="0">
+                        <a:rPr lang="es-ES_tradnl" sz="900" dirty="0">
                           <a:effectLst/>
                           <a:latin typeface="Times New Roman" panose="02020603050405020304" pitchFamily="18" charset="0"/>
                           <a:ea typeface="Times New Roman" panose="02020603050405020304" pitchFamily="18" charset="0"/>
@@ -14418,7 +14633,7 @@
                         <a:buNone/>
                       </a:pPr>
                       <a:r>
-                        <a:rPr lang="es-ES_tradnl" sz="1100" dirty="0">
+                        <a:rPr lang="es-ES_tradnl" sz="900" dirty="0">
                           <a:effectLst/>
                           <a:latin typeface="Times New Roman" panose="02020603050405020304" pitchFamily="18" charset="0"/>
                           <a:ea typeface="Times New Roman" panose="02020603050405020304" pitchFamily="18" charset="0"/>
@@ -14441,106 +14656,136 @@
                         <a:buNone/>
                       </a:pPr>
                       <a:r>
-                        <a:rPr lang="es-ES_tradnl" sz="1100" dirty="0">
+                        <a:rPr lang="es-ES" sz="900">
                           <a:effectLst/>
                           <a:latin typeface="Times New Roman" panose="02020603050405020304" pitchFamily="18" charset="0"/>
                           <a:ea typeface="Times New Roman" panose="02020603050405020304" pitchFamily="18" charset="0"/>
                           <a:cs typeface="Times New Roman" panose="02020603050405020304" pitchFamily="18" charset="0"/>
                         </a:rPr>
-                        <a:t>161.01</a:t>
-                      </a:r>
-                    </a:p>
-                  </a:txBody>
-                  <a:tcPr marL="68580" marR="68580" marT="0" marB="0">
-                    <a:noFill/>
-                  </a:tcPr>
-                </a:tc>
-                <a:tc>
-                  <a:txBody>
-                    <a:bodyPr/>
-                    <a:lstStyle/>
-                    <a:p>
-                      <a:pPr algn="ctr">
-                        <a:buNone/>
-                      </a:pPr>
-                      <a:r>
-                        <a:rPr lang="es-ES_tradnl" sz="1100" dirty="0">
+                        <a:t>6.00</a:t>
+                      </a:r>
+                      <a:endParaRPr lang="de-DE" sz="900">
+                        <a:effectLst/>
+                        <a:latin typeface="Times New Roman" panose="02020603050405020304" pitchFamily="18" charset="0"/>
+                        <a:ea typeface="Times New Roman" panose="02020603050405020304" pitchFamily="18" charset="0"/>
+                        <a:cs typeface="Times New Roman" panose="02020603050405020304" pitchFamily="18" charset="0"/>
+                      </a:endParaRPr>
+                    </a:p>
+                  </a:txBody>
+                  <a:tcPr marL="68580" marR="68580" marT="0" marB="0">
+                    <a:noFill/>
+                  </a:tcPr>
+                </a:tc>
+                <a:tc>
+                  <a:txBody>
+                    <a:bodyPr/>
+                    <a:lstStyle/>
+                    <a:p>
+                      <a:pPr algn="ctr">
+                        <a:buNone/>
+                      </a:pPr>
+                      <a:r>
+                        <a:rPr lang="es-ES" sz="900">
                           <a:effectLst/>
                           <a:latin typeface="Times New Roman" panose="02020603050405020304" pitchFamily="18" charset="0"/>
                           <a:ea typeface="Times New Roman" panose="02020603050405020304" pitchFamily="18" charset="0"/>
                           <a:cs typeface="Times New Roman" panose="02020603050405020304" pitchFamily="18" charset="0"/>
                         </a:rPr>
-                        <a:t>28.55</a:t>
-                      </a:r>
-                    </a:p>
-                  </a:txBody>
-                  <a:tcPr marL="68580" marR="68580" marT="0" marB="0">
-                    <a:noFill/>
-                  </a:tcPr>
-                </a:tc>
-                <a:tc>
-                  <a:txBody>
-                    <a:bodyPr/>
-                    <a:lstStyle/>
-                    <a:p>
-                      <a:pPr algn="ctr">
-                        <a:buNone/>
-                      </a:pPr>
-                      <a:r>
-                        <a:rPr lang="es-ES_tradnl" sz="1100" dirty="0">
+                        <a:t>2.59</a:t>
+                      </a:r>
+                      <a:endParaRPr lang="de-DE" sz="900">
+                        <a:effectLst/>
+                        <a:latin typeface="Times New Roman" panose="02020603050405020304" pitchFamily="18" charset="0"/>
+                        <a:ea typeface="Times New Roman" panose="02020603050405020304" pitchFamily="18" charset="0"/>
+                        <a:cs typeface="Times New Roman" panose="02020603050405020304" pitchFamily="18" charset="0"/>
+                      </a:endParaRPr>
+                    </a:p>
+                  </a:txBody>
+                  <a:tcPr marL="68580" marR="68580" marT="0" marB="0">
+                    <a:noFill/>
+                  </a:tcPr>
+                </a:tc>
+                <a:tc>
+                  <a:txBody>
+                    <a:bodyPr/>
+                    <a:lstStyle/>
+                    <a:p>
+                      <a:pPr algn="ctr">
+                        <a:buNone/>
+                      </a:pPr>
+                      <a:r>
+                        <a:rPr lang="es-ES" sz="900">
                           <a:effectLst/>
                           <a:latin typeface="Times New Roman" panose="02020603050405020304" pitchFamily="18" charset="0"/>
                           <a:ea typeface="Times New Roman" panose="02020603050405020304" pitchFamily="18" charset="0"/>
                           <a:cs typeface="Times New Roman" panose="02020603050405020304" pitchFamily="18" charset="0"/>
                         </a:rPr>
-                        <a:t>183.76</a:t>
-                      </a:r>
-                    </a:p>
-                  </a:txBody>
-                  <a:tcPr marL="68580" marR="68580" marT="0" marB="0">
-                    <a:noFill/>
-                  </a:tcPr>
-                </a:tc>
-                <a:tc>
-                  <a:txBody>
-                    <a:bodyPr/>
-                    <a:lstStyle/>
-                    <a:p>
-                      <a:pPr algn="ctr">
-                        <a:buNone/>
-                      </a:pPr>
-                      <a:r>
-                        <a:rPr lang="es-ES_tradnl" sz="1100" dirty="0">
+                        <a:t>30.81</a:t>
+                      </a:r>
+                      <a:endParaRPr lang="de-DE" sz="900">
+                        <a:effectLst/>
+                        <a:latin typeface="Times New Roman" panose="02020603050405020304" pitchFamily="18" charset="0"/>
+                        <a:ea typeface="Times New Roman" panose="02020603050405020304" pitchFamily="18" charset="0"/>
+                        <a:cs typeface="Times New Roman" panose="02020603050405020304" pitchFamily="18" charset="0"/>
+                      </a:endParaRPr>
+                    </a:p>
+                  </a:txBody>
+                  <a:tcPr marL="68580" marR="68580" marT="0" marB="0">
+                    <a:noFill/>
+                  </a:tcPr>
+                </a:tc>
+                <a:tc>
+                  <a:txBody>
+                    <a:bodyPr/>
+                    <a:lstStyle/>
+                    <a:p>
+                      <a:pPr algn="ctr">
+                        <a:buNone/>
+                      </a:pPr>
+                      <a:r>
+                        <a:rPr lang="es-ES" sz="900">
                           <a:effectLst/>
                           <a:latin typeface="Times New Roman" panose="02020603050405020304" pitchFamily="18" charset="0"/>
                           <a:ea typeface="Times New Roman" panose="02020603050405020304" pitchFamily="18" charset="0"/>
                           <a:cs typeface="Times New Roman" panose="02020603050405020304" pitchFamily="18" charset="0"/>
                         </a:rPr>
-                        <a:t>18.15</a:t>
-                      </a:r>
-                    </a:p>
-                  </a:txBody>
-                  <a:tcPr marL="68580" marR="68580" marT="0" marB="0">
-                    <a:noFill/>
-                  </a:tcPr>
-                </a:tc>
-                <a:tc>
-                  <a:txBody>
-                    <a:bodyPr/>
-                    <a:lstStyle/>
-                    <a:p>
-                      <a:pPr algn="ctr">
-                        <a:buNone/>
-                      </a:pPr>
-                      <a:r>
-                        <a:rPr lang="es-ES_tradnl" sz="1100" dirty="0">
+                        <a:t>13.10</a:t>
+                      </a:r>
+                      <a:endParaRPr lang="de-DE" sz="900">
+                        <a:effectLst/>
+                        <a:latin typeface="Times New Roman" panose="02020603050405020304" pitchFamily="18" charset="0"/>
+                        <a:ea typeface="Times New Roman" panose="02020603050405020304" pitchFamily="18" charset="0"/>
+                        <a:cs typeface="Times New Roman" panose="02020603050405020304" pitchFamily="18" charset="0"/>
+                      </a:endParaRPr>
+                    </a:p>
+                  </a:txBody>
+                  <a:tcPr marL="68580" marR="68580" marT="0" marB="0">
+                    <a:noFill/>
+                  </a:tcPr>
+                </a:tc>
+                <a:tc>
+                  <a:txBody>
+                    <a:bodyPr/>
+                    <a:lstStyle/>
+                    <a:p>
+                      <a:pPr algn="ctr">
+                        <a:buNone/>
+                      </a:pPr>
+                      <a:r>
+                        <a:rPr lang="es-ES" sz="900">
                           <a:effectLst/>
                           <a:latin typeface="Times New Roman" panose="02020603050405020304" pitchFamily="18" charset="0"/>
                           <a:ea typeface="Times New Roman" panose="02020603050405020304" pitchFamily="18" charset="0"/>
                           <a:cs typeface="Times New Roman" panose="02020603050405020304" pitchFamily="18" charset="0"/>
                         </a:rPr>
-                        <a:t>173.02</a:t>
-                      </a:r>
+                        <a:t>13.66</a:t>
+                      </a:r>
+                      <a:endParaRPr lang="de-DE" sz="900">
+                        <a:effectLst/>
+                        <a:latin typeface="Times New Roman" panose="02020603050405020304" pitchFamily="18" charset="0"/>
+                        <a:ea typeface="Times New Roman" panose="02020603050405020304" pitchFamily="18" charset="0"/>
+                        <a:cs typeface="Times New Roman" panose="02020603050405020304" pitchFamily="18" charset="0"/>
+                      </a:endParaRPr>
                     </a:p>
                   </a:txBody>
                   <a:tcPr marL="68580" marR="68580" marT="0" marB="0">
@@ -14589,7 +14834,7 @@
                         <a:buNone/>
                       </a:pPr>
                       <a:r>
-                        <a:rPr lang="es-ES_tradnl" sz="1100" dirty="0">
+                        <a:rPr lang="es-ES_tradnl" sz="900" dirty="0">
                           <a:effectLst/>
                           <a:latin typeface="Times New Roman" panose="02020603050405020304" pitchFamily="18" charset="0"/>
                           <a:ea typeface="Times New Roman" panose="02020603050405020304" pitchFamily="18" charset="0"/>
@@ -14612,7 +14857,7 @@
                         <a:buNone/>
                       </a:pPr>
                       <a:r>
-                        <a:rPr lang="es-ES_tradnl" sz="1100" dirty="0">
+                        <a:rPr lang="es-ES_tradnl" sz="900" dirty="0">
                           <a:effectLst/>
                           <a:latin typeface="Times New Roman" panose="02020603050405020304" pitchFamily="18" charset="0"/>
                           <a:ea typeface="Times New Roman" panose="02020603050405020304" pitchFamily="18" charset="0"/>
@@ -14635,7 +14880,7 @@
                         <a:buNone/>
                       </a:pPr>
                       <a:r>
-                        <a:rPr lang="es-ES_tradnl" sz="1100" dirty="0">
+                        <a:rPr lang="es-ES_tradnl" sz="900" dirty="0">
                           <a:effectLst/>
                           <a:latin typeface="Times New Roman" panose="02020603050405020304" pitchFamily="18" charset="0"/>
                           <a:ea typeface="Times New Roman" panose="02020603050405020304" pitchFamily="18" charset="0"/>
@@ -14658,7 +14903,7 @@
                         <a:buNone/>
                       </a:pPr>
                       <a:r>
-                        <a:rPr lang="es-ES_tradnl" sz="1100" dirty="0">
+                        <a:rPr lang="es-ES_tradnl" sz="900" dirty="0">
                           <a:effectLst/>
                           <a:latin typeface="Times New Roman" panose="02020603050405020304" pitchFamily="18" charset="0"/>
                           <a:ea typeface="Times New Roman" panose="02020603050405020304" pitchFamily="18" charset="0"/>
@@ -14681,7 +14926,7 @@
                         <a:buNone/>
                       </a:pPr>
                       <a:r>
-                        <a:rPr lang="es-ES_tradnl" sz="1100" dirty="0">
+                        <a:rPr lang="es-ES_tradnl" sz="900" dirty="0">
                           <a:effectLst/>
                           <a:latin typeface="Times New Roman" panose="02020603050405020304" pitchFamily="18" charset="0"/>
                           <a:ea typeface="Times New Roman" panose="02020603050405020304" pitchFamily="18" charset="0"/>
@@ -14704,7 +14949,7 @@
                         <a:buNone/>
                       </a:pPr>
                       <a:r>
-                        <a:rPr lang="es-ES_tradnl" sz="1100" dirty="0">
+                        <a:rPr lang="es-ES_tradnl" sz="900" dirty="0">
                           <a:effectLst/>
                           <a:latin typeface="Times New Roman" panose="02020603050405020304" pitchFamily="18" charset="0"/>
                           <a:ea typeface="Times New Roman" panose="02020603050405020304" pitchFamily="18" charset="0"/>
@@ -14727,7 +14972,7 @@
                         <a:buNone/>
                       </a:pPr>
                       <a:r>
-                        <a:rPr lang="es-ES_tradnl" sz="1100" dirty="0">
+                        <a:rPr lang="es-ES_tradnl" sz="900" dirty="0">
                           <a:effectLst/>
                           <a:latin typeface="Times New Roman" panose="02020603050405020304" pitchFamily="18" charset="0"/>
                           <a:ea typeface="Times New Roman" panose="02020603050405020304" pitchFamily="18" charset="0"/>
@@ -14750,7 +14995,7 @@
                         <a:buNone/>
                       </a:pPr>
                       <a:r>
-                        <a:rPr lang="es-ES_tradnl" sz="1100" dirty="0">
+                        <a:rPr lang="es-ES_tradnl" sz="900" dirty="0">
                           <a:effectLst/>
                           <a:latin typeface="Times New Roman" panose="02020603050405020304" pitchFamily="18" charset="0"/>
                           <a:ea typeface="Times New Roman" panose="02020603050405020304" pitchFamily="18" charset="0"/>
@@ -14773,7 +15018,7 @@
                         <a:buNone/>
                       </a:pPr>
                       <a:r>
-                        <a:rPr lang="es-ES_tradnl" sz="1100" dirty="0">
+                        <a:rPr lang="es-ES_tradnl" sz="900" dirty="0">
                           <a:effectLst/>
                           <a:latin typeface="Times New Roman" panose="02020603050405020304" pitchFamily="18" charset="0"/>
                           <a:ea typeface="Times New Roman" panose="02020603050405020304" pitchFamily="18" charset="0"/>
@@ -14796,7 +15041,7 @@
                         <a:buNone/>
                       </a:pPr>
                       <a:r>
-                        <a:rPr lang="es-ES_tradnl" sz="1100" dirty="0">
+                        <a:rPr lang="es-ES_tradnl" sz="900" dirty="0">
                           <a:effectLst/>
                           <a:latin typeface="Times New Roman" panose="02020603050405020304" pitchFamily="18" charset="0"/>
                           <a:ea typeface="Times New Roman" panose="02020603050405020304" pitchFamily="18" charset="0"/>
@@ -14819,106 +15064,136 @@
                         <a:buNone/>
                       </a:pPr>
                       <a:r>
-                        <a:rPr lang="es-ES_tradnl" sz="1100" dirty="0">
+                        <a:rPr lang="es-ES" sz="900">
                           <a:effectLst/>
                           <a:latin typeface="Times New Roman" panose="02020603050405020304" pitchFamily="18" charset="0"/>
                           <a:ea typeface="Times New Roman" panose="02020603050405020304" pitchFamily="18" charset="0"/>
                           <a:cs typeface="Times New Roman" panose="02020603050405020304" pitchFamily="18" charset="0"/>
                         </a:rPr>
-                        <a:t>161.01</a:t>
-                      </a:r>
-                    </a:p>
-                  </a:txBody>
-                  <a:tcPr marL="68580" marR="68580" marT="0" marB="0">
-                    <a:noFill/>
-                  </a:tcPr>
-                </a:tc>
-                <a:tc>
-                  <a:txBody>
-                    <a:bodyPr/>
-                    <a:lstStyle/>
-                    <a:p>
-                      <a:pPr algn="ctr">
-                        <a:buNone/>
-                      </a:pPr>
-                      <a:r>
-                        <a:rPr lang="es-ES_tradnl" sz="1100" dirty="0">
+                        <a:t>6.00</a:t>
+                      </a:r>
+                      <a:endParaRPr lang="de-DE" sz="900">
+                        <a:effectLst/>
+                        <a:latin typeface="Times New Roman" panose="02020603050405020304" pitchFamily="18" charset="0"/>
+                        <a:ea typeface="Times New Roman" panose="02020603050405020304" pitchFamily="18" charset="0"/>
+                        <a:cs typeface="Times New Roman" panose="02020603050405020304" pitchFamily="18" charset="0"/>
+                      </a:endParaRPr>
+                    </a:p>
+                  </a:txBody>
+                  <a:tcPr marL="68580" marR="68580" marT="0" marB="0">
+                    <a:noFill/>
+                  </a:tcPr>
+                </a:tc>
+                <a:tc>
+                  <a:txBody>
+                    <a:bodyPr/>
+                    <a:lstStyle/>
+                    <a:p>
+                      <a:pPr algn="ctr">
+                        <a:buNone/>
+                      </a:pPr>
+                      <a:r>
+                        <a:rPr lang="es-ES" sz="900">
                           <a:effectLst/>
                           <a:latin typeface="Times New Roman" panose="02020603050405020304" pitchFamily="18" charset="0"/>
                           <a:ea typeface="Times New Roman" panose="02020603050405020304" pitchFamily="18" charset="0"/>
                           <a:cs typeface="Times New Roman" panose="02020603050405020304" pitchFamily="18" charset="0"/>
                         </a:rPr>
-                        <a:t>28.33</a:t>
-                      </a:r>
-                    </a:p>
-                  </a:txBody>
-                  <a:tcPr marL="68580" marR="68580" marT="0" marB="0">
-                    <a:noFill/>
-                  </a:tcPr>
-                </a:tc>
-                <a:tc>
-                  <a:txBody>
-                    <a:bodyPr/>
-                    <a:lstStyle/>
-                    <a:p>
-                      <a:pPr algn="ctr">
-                        <a:buNone/>
-                      </a:pPr>
-                      <a:r>
-                        <a:rPr lang="es-ES_tradnl" sz="1100" dirty="0">
+                        <a:t>2.57</a:t>
+                      </a:r>
+                      <a:endParaRPr lang="de-DE" sz="900">
+                        <a:effectLst/>
+                        <a:latin typeface="Times New Roman" panose="02020603050405020304" pitchFamily="18" charset="0"/>
+                        <a:ea typeface="Times New Roman" panose="02020603050405020304" pitchFamily="18" charset="0"/>
+                        <a:cs typeface="Times New Roman" panose="02020603050405020304" pitchFamily="18" charset="0"/>
+                      </a:endParaRPr>
+                    </a:p>
+                  </a:txBody>
+                  <a:tcPr marL="68580" marR="68580" marT="0" marB="0">
+                    <a:noFill/>
+                  </a:tcPr>
+                </a:tc>
+                <a:tc>
+                  <a:txBody>
+                    <a:bodyPr/>
+                    <a:lstStyle/>
+                    <a:p>
+                      <a:pPr algn="ctr">
+                        <a:buNone/>
+                      </a:pPr>
+                      <a:r>
+                        <a:rPr lang="es-ES" sz="900">
                           <a:effectLst/>
                           <a:latin typeface="Times New Roman" panose="02020603050405020304" pitchFamily="18" charset="0"/>
                           <a:ea typeface="Times New Roman" panose="02020603050405020304" pitchFamily="18" charset="0"/>
                           <a:cs typeface="Times New Roman" panose="02020603050405020304" pitchFamily="18" charset="0"/>
                         </a:rPr>
-                        <a:t>201.38</a:t>
-                      </a:r>
-                    </a:p>
-                  </a:txBody>
-                  <a:tcPr marL="68580" marR="68580" marT="0" marB="0">
-                    <a:noFill/>
-                  </a:tcPr>
-                </a:tc>
-                <a:tc>
-                  <a:txBody>
-                    <a:bodyPr/>
-                    <a:lstStyle/>
-                    <a:p>
-                      <a:pPr algn="ctr">
-                        <a:buNone/>
-                      </a:pPr>
-                      <a:r>
-                        <a:rPr lang="es-ES_tradnl" sz="1100" dirty="0">
+                        <a:t>31.31</a:t>
+                      </a:r>
+                      <a:endParaRPr lang="de-DE" sz="900">
+                        <a:effectLst/>
+                        <a:latin typeface="Times New Roman" panose="02020603050405020304" pitchFamily="18" charset="0"/>
+                        <a:ea typeface="Times New Roman" panose="02020603050405020304" pitchFamily="18" charset="0"/>
+                        <a:cs typeface="Times New Roman" panose="02020603050405020304" pitchFamily="18" charset="0"/>
+                      </a:endParaRPr>
+                    </a:p>
+                  </a:txBody>
+                  <a:tcPr marL="68580" marR="68580" marT="0" marB="0">
+                    <a:noFill/>
+                  </a:tcPr>
+                </a:tc>
+                <a:tc>
+                  <a:txBody>
+                    <a:bodyPr/>
+                    <a:lstStyle/>
+                    <a:p>
+                      <a:pPr algn="ctr">
+                        <a:buNone/>
+                      </a:pPr>
+                      <a:r>
+                        <a:rPr lang="es-ES" sz="900">
                           <a:effectLst/>
                           <a:latin typeface="Times New Roman" panose="02020603050405020304" pitchFamily="18" charset="0"/>
                           <a:ea typeface="Times New Roman" panose="02020603050405020304" pitchFamily="18" charset="0"/>
                           <a:cs typeface="Times New Roman" panose="02020603050405020304" pitchFamily="18" charset="0"/>
                         </a:rPr>
-                        <a:t>17.37</a:t>
-                      </a:r>
-                    </a:p>
-                  </a:txBody>
-                  <a:tcPr marL="68580" marR="68580" marT="0" marB="0">
-                    <a:noFill/>
-                  </a:tcPr>
-                </a:tc>
-                <a:tc>
-                  <a:txBody>
-                    <a:bodyPr/>
-                    <a:lstStyle/>
-                    <a:p>
-                      <a:pPr algn="ctr">
-                        <a:buNone/>
-                      </a:pPr>
-                      <a:r>
-                        <a:rPr lang="es-ES_tradnl" sz="1100" dirty="0">
+                        <a:t>12.95</a:t>
+                      </a:r>
+                      <a:endParaRPr lang="de-DE" sz="900">
+                        <a:effectLst/>
+                        <a:latin typeface="Times New Roman" panose="02020603050405020304" pitchFamily="18" charset="0"/>
+                        <a:ea typeface="Times New Roman" panose="02020603050405020304" pitchFamily="18" charset="0"/>
+                        <a:cs typeface="Times New Roman" panose="02020603050405020304" pitchFamily="18" charset="0"/>
+                      </a:endParaRPr>
+                    </a:p>
+                  </a:txBody>
+                  <a:tcPr marL="68580" marR="68580" marT="0" marB="0">
+                    <a:noFill/>
+                  </a:tcPr>
+                </a:tc>
+                <a:tc>
+                  <a:txBody>
+                    <a:bodyPr/>
+                    <a:lstStyle/>
+                    <a:p>
+                      <a:pPr algn="ctr">
+                        <a:buNone/>
+                      </a:pPr>
+                      <a:r>
+                        <a:rPr lang="es-ES" sz="900" dirty="0">
                           <a:effectLst/>
                           <a:latin typeface="Times New Roman" panose="02020603050405020304" pitchFamily="18" charset="0"/>
                           <a:ea typeface="Times New Roman" panose="02020603050405020304" pitchFamily="18" charset="0"/>
                           <a:cs typeface="Times New Roman" panose="02020603050405020304" pitchFamily="18" charset="0"/>
                         </a:rPr>
-                        <a:t>171.94</a:t>
-                      </a:r>
+                        <a:t>15.73</a:t>
+                      </a:r>
+                      <a:endParaRPr lang="de-DE" sz="900" dirty="0">
+                        <a:effectLst/>
+                        <a:latin typeface="Times New Roman" panose="02020603050405020304" pitchFamily="18" charset="0"/>
+                        <a:ea typeface="Times New Roman" panose="02020603050405020304" pitchFamily="18" charset="0"/>
+                        <a:cs typeface="Times New Roman" panose="02020603050405020304" pitchFamily="18" charset="0"/>
+                      </a:endParaRPr>
                     </a:p>
                   </a:txBody>
                   <a:tcPr marL="68580" marR="68580" marT="0" marB="0">
